--- a/CY-SE-013 - Supply Chain Security/slides/Aula_09_Concluir_Atividades_e_Preencher_Rubricas.pptx
+++ b/CY-SE-013 - Supply Chain Security/slides/Aula_09_Concluir_Atividades_e_Preencher_Rubricas.pptx
@@ -14,6 +14,7 @@
     <p:sldId id="259" r:id="rId8"/>
     <p:sldId id="260" r:id="rId7"/>
     <p:sldId id="261" r:id="rId6"/>
+    <p:sldId id="266" r:id="rId34"/>
     <p:sldId id="262" r:id="rId30"/>
     <p:sldId id="263" r:id="rId31"/>
     <p:sldId id="264" r:id="rId32"/>
@@ -4492,6 +4493,1116 @@
           </a:prstGeom>
         </p:spPr>
       </p:pic>
+      <p:sp>
+        <p:nvSpPr>
+          <p:cNvPr id="3" name="TextBox 2"/>
+          <p:cNvSpPr txBox="1"/>
+          <p:nvPr/>
+        </p:nvSpPr>
+        <p:spPr>
+          <a:xfrm>
+            <a:off x="311700" y="796148"/>
+            <a:ext cx="8520600" cy="240000"/>
+          </a:xfrm>
+          <a:prstGeom prst="rect">
+            <a:avLst/>
+          </a:prstGeom>
+          <a:noFill/>
+        </p:spPr>
+        <p:txBody>
+          <a:bodyPr wrap="square" anchor="t" lIns="0" rIns="0" tIns="0" bIns="0">
+            <a:spAutoFit/>
+          </a:bodyPr>
+          <a:lstStyle/>
+          <a:p>
+            <a:pPr algn="l"/>
+            <a:r>
+              <a:rPr sz="1100" b="0" i="0">
+                <a:solidFill>
+                  <a:srgbClr val="2371FF"/>
+                </a:solidFill>
+                <a:latin typeface="Segoe UI Semibold"/>
+              </a:rPr>
+              <a:t>RESUMO</a:t>
+            </a:r>
+          </a:p>
+        </p:txBody>
+      </p:sp>
+      <p:sp>
+        <p:nvSpPr>
+          <p:cNvPr id="4" name="TextBox 3"/>
+          <p:cNvSpPr txBox="1"/>
+          <p:nvPr/>
+        </p:nvSpPr>
+        <p:spPr>
+          <a:xfrm>
+            <a:off x="311700" y="1056148"/>
+            <a:ext cx="8520600" cy="560000"/>
+          </a:xfrm>
+          <a:prstGeom prst="rect">
+            <a:avLst/>
+          </a:prstGeom>
+          <a:noFill/>
+        </p:spPr>
+        <p:txBody>
+          <a:bodyPr wrap="square" anchor="t" lIns="0" rIns="0" tIns="0" bIns="0">
+            <a:spAutoFit/>
+          </a:bodyPr>
+          <a:lstStyle/>
+          <a:p>
+            <a:pPr algn="l"/>
+            <a:r>
+              <a:rPr sz="2600" b="0" i="0">
+                <a:solidFill>
+                  <a:srgbClr val="181C23"/>
+                </a:solidFill>
+                <a:latin typeface="Segoe UI Semibold"/>
+              </a:rPr>
+              <a:t>Recapitulando a Aula</a:t>
+            </a:r>
+          </a:p>
+        </p:txBody>
+      </p:sp>
+      <p:sp>
+        <p:nvSpPr>
+          <p:cNvPr id="5" name="Rectangle 4"/>
+          <p:cNvSpPr/>
+          <p:nvPr/>
+        </p:nvSpPr>
+        <p:spPr>
+          <a:xfrm>
+            <a:off x="311700" y="1616148"/>
+            <a:ext cx="900000" cy="55000"/>
+          </a:xfrm>
+          <a:prstGeom prst="rect">
+            <a:avLst/>
+          </a:prstGeom>
+          <a:solidFill>
+            <a:srgbClr val="A6F750"/>
+          </a:solidFill>
+          <a:ln>
+            <a:noFill/>
+          </a:ln>
+          <a:effectLst/>
+        </p:spPr>
+        <p:style>
+          <a:lnRef idx="1">
+            <a:schemeClr val="accent1"/>
+          </a:lnRef>
+          <a:fillRef idx="3">
+            <a:schemeClr val="accent1"/>
+          </a:fillRef>
+          <a:effectRef idx="2">
+            <a:schemeClr val="accent1"/>
+          </a:effectRef>
+          <a:fontRef idx="minor">
+            <a:schemeClr val="lt1"/>
+          </a:fontRef>
+        </p:style>
+        <p:txBody>
+          <a:bodyPr rtlCol="0" anchor="ctr"/>
+          <a:lstStyle/>
+          <a:p>
+            <a:pPr algn="ctr"/>
+          </a:p>
+        </p:txBody>
+      </p:sp>
+      <p:sp>
+        <p:nvSpPr>
+          <p:cNvPr id="6" name="Rounded Rectangle 5"/>
+          <p:cNvSpPr/>
+          <p:nvPr/>
+        </p:nvSpPr>
+        <p:spPr>
+          <a:xfrm>
+            <a:off x="311700" y="1746148"/>
+            <a:ext cx="8520600" cy="570000"/>
+          </a:xfrm>
+          <a:prstGeom prst="roundRect">
+            <a:avLst>
+              <a:gd name="adj" fmla="val 8000"/>
+            </a:avLst>
+          </a:prstGeom>
+          <a:solidFill>
+            <a:srgbClr val="ECEDF3"/>
+          </a:solidFill>
+          <a:ln>
+            <a:noFill/>
+          </a:ln>
+          <a:effectLst/>
+        </p:spPr>
+        <p:style>
+          <a:lnRef idx="1">
+            <a:schemeClr val="accent1"/>
+          </a:lnRef>
+          <a:fillRef idx="3">
+            <a:schemeClr val="accent1"/>
+          </a:fillRef>
+          <a:effectRef idx="2">
+            <a:schemeClr val="accent1"/>
+          </a:effectRef>
+          <a:fontRef idx="minor">
+            <a:schemeClr val="lt1"/>
+          </a:fontRef>
+        </p:style>
+        <p:txBody>
+          <a:bodyPr rtlCol="0" anchor="ctr"/>
+          <a:lstStyle/>
+          <a:p>
+            <a:pPr algn="ctr"/>
+          </a:p>
+        </p:txBody>
+      </p:sp>
+      <p:sp>
+        <p:nvSpPr>
+          <p:cNvPr id="7" name="Rounded Rectangle 6"/>
+          <p:cNvSpPr/>
+          <p:nvPr/>
+        </p:nvSpPr>
+        <p:spPr>
+          <a:xfrm>
+            <a:off x="311700" y="1746148"/>
+            <a:ext cx="70000" cy="570000"/>
+          </a:xfrm>
+          <a:prstGeom prst="roundRect">
+            <a:avLst>
+              <a:gd name="adj" fmla="val 50000"/>
+            </a:avLst>
+          </a:prstGeom>
+          <a:solidFill>
+            <a:srgbClr val="A6F750"/>
+          </a:solidFill>
+          <a:ln>
+            <a:noFill/>
+          </a:ln>
+          <a:effectLst/>
+        </p:spPr>
+        <p:style>
+          <a:lnRef idx="1">
+            <a:schemeClr val="accent1"/>
+          </a:lnRef>
+          <a:fillRef idx="3">
+            <a:schemeClr val="accent1"/>
+          </a:fillRef>
+          <a:effectRef idx="2">
+            <a:schemeClr val="accent1"/>
+          </a:effectRef>
+          <a:fontRef idx="minor">
+            <a:schemeClr val="lt1"/>
+          </a:fontRef>
+        </p:style>
+        <p:txBody>
+          <a:bodyPr rtlCol="0" anchor="ctr"/>
+          <a:lstStyle/>
+          <a:p>
+            <a:pPr algn="ctr"/>
+          </a:p>
+        </p:txBody>
+      </p:sp>
+      <p:sp>
+        <p:nvSpPr>
+          <p:cNvPr id="8" name="Oval 7"/>
+          <p:cNvSpPr/>
+          <p:nvPr/>
+        </p:nvSpPr>
+        <p:spPr>
+          <a:xfrm>
+            <a:off x="491700" y="1881148"/>
+            <a:ext cx="300000" cy="300000"/>
+          </a:xfrm>
+          <a:prstGeom prst="ellipse">
+            <a:avLst/>
+          </a:prstGeom>
+          <a:solidFill>
+            <a:srgbClr val="2371FF"/>
+          </a:solidFill>
+          <a:ln>
+            <a:noFill/>
+          </a:ln>
+          <a:effectLst/>
+        </p:spPr>
+        <p:style>
+          <a:lnRef idx="1">
+            <a:schemeClr val="accent1"/>
+          </a:lnRef>
+          <a:fillRef idx="3">
+            <a:schemeClr val="accent1"/>
+          </a:fillRef>
+          <a:effectRef idx="2">
+            <a:schemeClr val="accent1"/>
+          </a:effectRef>
+          <a:fontRef idx="minor">
+            <a:schemeClr val="lt1"/>
+          </a:fontRef>
+        </p:style>
+        <p:txBody>
+          <a:bodyPr rtlCol="0" anchor="ctr"/>
+          <a:lstStyle/>
+          <a:p>
+            <a:pPr algn="ctr"/>
+          </a:p>
+        </p:txBody>
+      </p:sp>
+      <p:sp>
+        <p:nvSpPr>
+          <p:cNvPr id="9" name="TextBox 8"/>
+          <p:cNvSpPr txBox="1"/>
+          <p:nvPr/>
+        </p:nvSpPr>
+        <p:spPr>
+          <a:xfrm>
+            <a:off x="491700" y="1881148"/>
+            <a:ext cx="300000" cy="300000"/>
+          </a:xfrm>
+          <a:prstGeom prst="rect">
+            <a:avLst/>
+          </a:prstGeom>
+          <a:noFill/>
+        </p:spPr>
+        <p:txBody>
+          <a:bodyPr wrap="square" anchor="ctr" lIns="0" rIns="0" tIns="0" bIns="0">
+            <a:spAutoFit/>
+          </a:bodyPr>
+          <a:lstStyle/>
+          <a:p>
+            <a:pPr algn="ctr"/>
+            <a:r>
+              <a:rPr sz="1400" b="1" i="0">
+                <a:solidFill>
+                  <a:srgbClr val="FFFDF8"/>
+                </a:solidFill>
+                <a:latin typeface="Segoe UI Semibold"/>
+              </a:rPr>
+              <a:t>✓</a:t>
+            </a:r>
+          </a:p>
+        </p:txBody>
+      </p:sp>
+      <p:sp>
+        <p:nvSpPr>
+          <p:cNvPr id="10" name="TextBox 9"/>
+          <p:cNvSpPr txBox="1"/>
+          <p:nvPr/>
+        </p:nvSpPr>
+        <p:spPr>
+          <a:xfrm>
+            <a:off x="971700" y="1746148"/>
+            <a:ext cx="7680600" cy="570000"/>
+          </a:xfrm>
+          <a:prstGeom prst="rect">
+            <a:avLst/>
+          </a:prstGeom>
+          <a:noFill/>
+        </p:spPr>
+        <p:txBody>
+          <a:bodyPr wrap="square" anchor="ctr" lIns="0" rIns="0" tIns="0" bIns="0">
+            <a:spAutoFit/>
+          </a:bodyPr>
+          <a:lstStyle/>
+          <a:p>
+            <a:pPr algn="l">
+              <a:lnSpc>
+                <a:spcPct val="105000"/>
+              </a:lnSpc>
+            </a:pPr>
+            <a:r>
+              <a:rPr sz="1300" b="0" i="0">
+                <a:solidFill>
+                  <a:srgbClr val="181C23"/>
+                </a:solidFill>
+                <a:latin typeface="Segoe UI"/>
+              </a:rPr>
+              <a:t>Política → inventário → cadeia → compliance: uma camada de governança sobre o pipeline DevSecOps.</a:t>
+            </a:r>
+          </a:p>
+        </p:txBody>
+      </p:sp>
+      <p:sp>
+        <p:nvSpPr>
+          <p:cNvPr id="11" name="Rounded Rectangle 10"/>
+          <p:cNvSpPr/>
+          <p:nvPr/>
+        </p:nvSpPr>
+        <p:spPr>
+          <a:xfrm>
+            <a:off x="311700" y="2446148"/>
+            <a:ext cx="8520600" cy="570000"/>
+          </a:xfrm>
+          <a:prstGeom prst="roundRect">
+            <a:avLst>
+              <a:gd name="adj" fmla="val 8000"/>
+            </a:avLst>
+          </a:prstGeom>
+          <a:solidFill>
+            <a:srgbClr val="ECEDF3"/>
+          </a:solidFill>
+          <a:ln>
+            <a:noFill/>
+          </a:ln>
+          <a:effectLst/>
+        </p:spPr>
+        <p:style>
+          <a:lnRef idx="1">
+            <a:schemeClr val="accent1"/>
+          </a:lnRef>
+          <a:fillRef idx="3">
+            <a:schemeClr val="accent1"/>
+          </a:fillRef>
+          <a:effectRef idx="2">
+            <a:schemeClr val="accent1"/>
+          </a:effectRef>
+          <a:fontRef idx="minor">
+            <a:schemeClr val="lt1"/>
+          </a:fontRef>
+        </p:style>
+        <p:txBody>
+          <a:bodyPr rtlCol="0" anchor="ctr"/>
+          <a:lstStyle/>
+          <a:p>
+            <a:pPr algn="ctr"/>
+          </a:p>
+        </p:txBody>
+      </p:sp>
+      <p:sp>
+        <p:nvSpPr>
+          <p:cNvPr id="12" name="Rounded Rectangle 11"/>
+          <p:cNvSpPr/>
+          <p:nvPr/>
+        </p:nvSpPr>
+        <p:spPr>
+          <a:xfrm>
+            <a:off x="311700" y="2446148"/>
+            <a:ext cx="70000" cy="570000"/>
+          </a:xfrm>
+          <a:prstGeom prst="roundRect">
+            <a:avLst>
+              <a:gd name="adj" fmla="val 50000"/>
+            </a:avLst>
+          </a:prstGeom>
+          <a:solidFill>
+            <a:srgbClr val="A6F750"/>
+          </a:solidFill>
+          <a:ln>
+            <a:noFill/>
+          </a:ln>
+          <a:effectLst/>
+        </p:spPr>
+        <p:style>
+          <a:lnRef idx="1">
+            <a:schemeClr val="accent1"/>
+          </a:lnRef>
+          <a:fillRef idx="3">
+            <a:schemeClr val="accent1"/>
+          </a:fillRef>
+          <a:effectRef idx="2">
+            <a:schemeClr val="accent1"/>
+          </a:effectRef>
+          <a:fontRef idx="minor">
+            <a:schemeClr val="lt1"/>
+          </a:fontRef>
+        </p:style>
+        <p:txBody>
+          <a:bodyPr rtlCol="0" anchor="ctr"/>
+          <a:lstStyle/>
+          <a:p>
+            <a:pPr algn="ctr"/>
+          </a:p>
+        </p:txBody>
+      </p:sp>
+      <p:sp>
+        <p:nvSpPr>
+          <p:cNvPr id="13" name="Oval 12"/>
+          <p:cNvSpPr/>
+          <p:nvPr/>
+        </p:nvSpPr>
+        <p:spPr>
+          <a:xfrm>
+            <a:off x="491700" y="2581148"/>
+            <a:ext cx="300000" cy="300000"/>
+          </a:xfrm>
+          <a:prstGeom prst="ellipse">
+            <a:avLst/>
+          </a:prstGeom>
+          <a:solidFill>
+            <a:srgbClr val="2371FF"/>
+          </a:solidFill>
+          <a:ln>
+            <a:noFill/>
+          </a:ln>
+          <a:effectLst/>
+        </p:spPr>
+        <p:style>
+          <a:lnRef idx="1">
+            <a:schemeClr val="accent1"/>
+          </a:lnRef>
+          <a:fillRef idx="3">
+            <a:schemeClr val="accent1"/>
+          </a:fillRef>
+          <a:effectRef idx="2">
+            <a:schemeClr val="accent1"/>
+          </a:effectRef>
+          <a:fontRef idx="minor">
+            <a:schemeClr val="lt1"/>
+          </a:fontRef>
+        </p:style>
+        <p:txBody>
+          <a:bodyPr rtlCol="0" anchor="ctr"/>
+          <a:lstStyle/>
+          <a:p>
+            <a:pPr algn="ctr"/>
+          </a:p>
+        </p:txBody>
+      </p:sp>
+      <p:sp>
+        <p:nvSpPr>
+          <p:cNvPr id="14" name="TextBox 13"/>
+          <p:cNvSpPr txBox="1"/>
+          <p:nvPr/>
+        </p:nvSpPr>
+        <p:spPr>
+          <a:xfrm>
+            <a:off x="491700" y="2581148"/>
+            <a:ext cx="300000" cy="300000"/>
+          </a:xfrm>
+          <a:prstGeom prst="rect">
+            <a:avLst/>
+          </a:prstGeom>
+          <a:noFill/>
+        </p:spPr>
+        <p:txBody>
+          <a:bodyPr wrap="square" anchor="ctr" lIns="0" rIns="0" tIns="0" bIns="0">
+            <a:spAutoFit/>
+          </a:bodyPr>
+          <a:lstStyle/>
+          <a:p>
+            <a:pPr algn="ctr"/>
+            <a:r>
+              <a:rPr sz="1400" b="1" i="0">
+                <a:solidFill>
+                  <a:srgbClr val="FFFDF8"/>
+                </a:solidFill>
+                <a:latin typeface="Segoe UI Semibold"/>
+              </a:rPr>
+              <a:t>✓</a:t>
+            </a:r>
+          </a:p>
+        </p:txBody>
+      </p:sp>
+      <p:sp>
+        <p:nvSpPr>
+          <p:cNvPr id="15" name="TextBox 14"/>
+          <p:cNvSpPr txBox="1"/>
+          <p:nvPr/>
+        </p:nvSpPr>
+        <p:spPr>
+          <a:xfrm>
+            <a:off x="971700" y="2446148"/>
+            <a:ext cx="7680600" cy="570000"/>
+          </a:xfrm>
+          <a:prstGeom prst="rect">
+            <a:avLst/>
+          </a:prstGeom>
+          <a:noFill/>
+        </p:spPr>
+        <p:txBody>
+          <a:bodyPr wrap="square" anchor="ctr" lIns="0" rIns="0" tIns="0" bIns="0">
+            <a:spAutoFit/>
+          </a:bodyPr>
+          <a:lstStyle/>
+          <a:p>
+            <a:pPr algn="l">
+              <a:lnSpc>
+                <a:spcPct val="105000"/>
+              </a:lnSpc>
+            </a:pPr>
+            <a:r>
+              <a:rPr sz="1300" b="0" i="0">
+                <a:solidFill>
+                  <a:srgbClr val="181C23"/>
+                </a:solidFill>
+                <a:latin typeface="Segoe UI"/>
+              </a:rPr>
+              <a:t>Controles viram código, código vira gate, gate vira evidência.</a:t>
+            </a:r>
+          </a:p>
+        </p:txBody>
+      </p:sp>
+      <p:sp>
+        <p:nvSpPr>
+          <p:cNvPr id="16" name="Rounded Rectangle 15"/>
+          <p:cNvSpPr/>
+          <p:nvPr/>
+        </p:nvSpPr>
+        <p:spPr>
+          <a:xfrm>
+            <a:off x="311700" y="3146148"/>
+            <a:ext cx="8520600" cy="570000"/>
+          </a:xfrm>
+          <a:prstGeom prst="roundRect">
+            <a:avLst>
+              <a:gd name="adj" fmla="val 8000"/>
+            </a:avLst>
+          </a:prstGeom>
+          <a:solidFill>
+            <a:srgbClr val="ECEDF3"/>
+          </a:solidFill>
+          <a:ln>
+            <a:noFill/>
+          </a:ln>
+          <a:effectLst/>
+        </p:spPr>
+        <p:style>
+          <a:lnRef idx="1">
+            <a:schemeClr val="accent1"/>
+          </a:lnRef>
+          <a:fillRef idx="3">
+            <a:schemeClr val="accent1"/>
+          </a:fillRef>
+          <a:effectRef idx="2">
+            <a:schemeClr val="accent1"/>
+          </a:effectRef>
+          <a:fontRef idx="minor">
+            <a:schemeClr val="lt1"/>
+          </a:fontRef>
+        </p:style>
+        <p:txBody>
+          <a:bodyPr rtlCol="0" anchor="ctr"/>
+          <a:lstStyle/>
+          <a:p>
+            <a:pPr algn="ctr"/>
+          </a:p>
+        </p:txBody>
+      </p:sp>
+      <p:sp>
+        <p:nvSpPr>
+          <p:cNvPr id="17" name="Rounded Rectangle 16"/>
+          <p:cNvSpPr/>
+          <p:nvPr/>
+        </p:nvSpPr>
+        <p:spPr>
+          <a:xfrm>
+            <a:off x="311700" y="3146148"/>
+            <a:ext cx="70000" cy="570000"/>
+          </a:xfrm>
+          <a:prstGeom prst="roundRect">
+            <a:avLst>
+              <a:gd name="adj" fmla="val 50000"/>
+            </a:avLst>
+          </a:prstGeom>
+          <a:solidFill>
+            <a:srgbClr val="A6F750"/>
+          </a:solidFill>
+          <a:ln>
+            <a:noFill/>
+          </a:ln>
+          <a:effectLst/>
+        </p:spPr>
+        <p:style>
+          <a:lnRef idx="1">
+            <a:schemeClr val="accent1"/>
+          </a:lnRef>
+          <a:fillRef idx="3">
+            <a:schemeClr val="accent1"/>
+          </a:fillRef>
+          <a:effectRef idx="2">
+            <a:schemeClr val="accent1"/>
+          </a:effectRef>
+          <a:fontRef idx="minor">
+            <a:schemeClr val="lt1"/>
+          </a:fontRef>
+        </p:style>
+        <p:txBody>
+          <a:bodyPr rtlCol="0" anchor="ctr"/>
+          <a:lstStyle/>
+          <a:p>
+            <a:pPr algn="ctr"/>
+          </a:p>
+        </p:txBody>
+      </p:sp>
+      <p:sp>
+        <p:nvSpPr>
+          <p:cNvPr id="18" name="Oval 17"/>
+          <p:cNvSpPr/>
+          <p:nvPr/>
+        </p:nvSpPr>
+        <p:spPr>
+          <a:xfrm>
+            <a:off x="491700" y="3281148"/>
+            <a:ext cx="300000" cy="300000"/>
+          </a:xfrm>
+          <a:prstGeom prst="ellipse">
+            <a:avLst/>
+          </a:prstGeom>
+          <a:solidFill>
+            <a:srgbClr val="2371FF"/>
+          </a:solidFill>
+          <a:ln>
+            <a:noFill/>
+          </a:ln>
+          <a:effectLst/>
+        </p:spPr>
+        <p:style>
+          <a:lnRef idx="1">
+            <a:schemeClr val="accent1"/>
+          </a:lnRef>
+          <a:fillRef idx="3">
+            <a:schemeClr val="accent1"/>
+          </a:fillRef>
+          <a:effectRef idx="2">
+            <a:schemeClr val="accent1"/>
+          </a:effectRef>
+          <a:fontRef idx="minor">
+            <a:schemeClr val="lt1"/>
+          </a:fontRef>
+        </p:style>
+        <p:txBody>
+          <a:bodyPr rtlCol="0" anchor="ctr"/>
+          <a:lstStyle/>
+          <a:p>
+            <a:pPr algn="ctr"/>
+          </a:p>
+        </p:txBody>
+      </p:sp>
+      <p:sp>
+        <p:nvSpPr>
+          <p:cNvPr id="19" name="TextBox 18"/>
+          <p:cNvSpPr txBox="1"/>
+          <p:nvPr/>
+        </p:nvSpPr>
+        <p:spPr>
+          <a:xfrm>
+            <a:off x="491700" y="3281148"/>
+            <a:ext cx="300000" cy="300000"/>
+          </a:xfrm>
+          <a:prstGeom prst="rect">
+            <a:avLst/>
+          </a:prstGeom>
+          <a:noFill/>
+        </p:spPr>
+        <p:txBody>
+          <a:bodyPr wrap="square" anchor="ctr" lIns="0" rIns="0" tIns="0" bIns="0">
+            <a:spAutoFit/>
+          </a:bodyPr>
+          <a:lstStyle/>
+          <a:p>
+            <a:pPr algn="ctr"/>
+            <a:r>
+              <a:rPr sz="1400" b="1" i="0">
+                <a:solidFill>
+                  <a:srgbClr val="FFFDF8"/>
+                </a:solidFill>
+                <a:latin typeface="Segoe UI Semibold"/>
+              </a:rPr>
+              <a:t>✓</a:t>
+            </a:r>
+          </a:p>
+        </p:txBody>
+      </p:sp>
+      <p:sp>
+        <p:nvSpPr>
+          <p:cNvPr id="20" name="TextBox 19"/>
+          <p:cNvSpPr txBox="1"/>
+          <p:nvPr/>
+        </p:nvSpPr>
+        <p:spPr>
+          <a:xfrm>
+            <a:off x="971700" y="3146148"/>
+            <a:ext cx="7680600" cy="570000"/>
+          </a:xfrm>
+          <a:prstGeom prst="rect">
+            <a:avLst/>
+          </a:prstGeom>
+          <a:noFill/>
+        </p:spPr>
+        <p:txBody>
+          <a:bodyPr wrap="square" anchor="ctr" lIns="0" rIns="0" tIns="0" bIns="0">
+            <a:spAutoFit/>
+          </a:bodyPr>
+          <a:lstStyle/>
+          <a:p>
+            <a:pPr algn="l">
+              <a:lnSpc>
+                <a:spcPct val="105000"/>
+              </a:lnSpc>
+            </a:pPr>
+            <a:r>
+              <a:rPr sz="1300" b="0" i="0">
+                <a:solidFill>
+                  <a:srgbClr val="181C23"/>
+                </a:solidFill>
+                <a:latin typeface="Segoe UI"/>
+              </a:rPr>
+              <a:t>As rubricas registram o aprendizado e orientam os próximos passos.</a:t>
+            </a:r>
+          </a:p>
+        </p:txBody>
+      </p:sp>
+      <p:sp>
+        <p:nvSpPr>
+          <p:cNvPr id="21" name="Rounded Rectangle 20"/>
+          <p:cNvSpPr/>
+          <p:nvPr/>
+        </p:nvSpPr>
+        <p:spPr>
+          <a:xfrm>
+            <a:off x="311700" y="3846148"/>
+            <a:ext cx="8520600" cy="570000"/>
+          </a:xfrm>
+          <a:prstGeom prst="roundRect">
+            <a:avLst>
+              <a:gd name="adj" fmla="val 8000"/>
+            </a:avLst>
+          </a:prstGeom>
+          <a:solidFill>
+            <a:srgbClr val="ECEDF3"/>
+          </a:solidFill>
+          <a:ln>
+            <a:noFill/>
+          </a:ln>
+          <a:effectLst/>
+        </p:spPr>
+        <p:style>
+          <a:lnRef idx="1">
+            <a:schemeClr val="accent1"/>
+          </a:lnRef>
+          <a:fillRef idx="3">
+            <a:schemeClr val="accent1"/>
+          </a:fillRef>
+          <a:effectRef idx="2">
+            <a:schemeClr val="accent1"/>
+          </a:effectRef>
+          <a:fontRef idx="minor">
+            <a:schemeClr val="lt1"/>
+          </a:fontRef>
+        </p:style>
+        <p:txBody>
+          <a:bodyPr rtlCol="0" anchor="ctr"/>
+          <a:lstStyle/>
+          <a:p>
+            <a:pPr algn="ctr"/>
+          </a:p>
+        </p:txBody>
+      </p:sp>
+      <p:sp>
+        <p:nvSpPr>
+          <p:cNvPr id="22" name="Rounded Rectangle 21"/>
+          <p:cNvSpPr/>
+          <p:nvPr/>
+        </p:nvSpPr>
+        <p:spPr>
+          <a:xfrm>
+            <a:off x="311700" y="3846148"/>
+            <a:ext cx="70000" cy="570000"/>
+          </a:xfrm>
+          <a:prstGeom prst="roundRect">
+            <a:avLst>
+              <a:gd name="adj" fmla="val 50000"/>
+            </a:avLst>
+          </a:prstGeom>
+          <a:solidFill>
+            <a:srgbClr val="A6F750"/>
+          </a:solidFill>
+          <a:ln>
+            <a:noFill/>
+          </a:ln>
+          <a:effectLst/>
+        </p:spPr>
+        <p:style>
+          <a:lnRef idx="1">
+            <a:schemeClr val="accent1"/>
+          </a:lnRef>
+          <a:fillRef idx="3">
+            <a:schemeClr val="accent1"/>
+          </a:fillRef>
+          <a:effectRef idx="2">
+            <a:schemeClr val="accent1"/>
+          </a:effectRef>
+          <a:fontRef idx="minor">
+            <a:schemeClr val="lt1"/>
+          </a:fontRef>
+        </p:style>
+        <p:txBody>
+          <a:bodyPr rtlCol="0" anchor="ctr"/>
+          <a:lstStyle/>
+          <a:p>
+            <a:pPr algn="ctr"/>
+          </a:p>
+        </p:txBody>
+      </p:sp>
+      <p:sp>
+        <p:nvSpPr>
+          <p:cNvPr id="23" name="Oval 22"/>
+          <p:cNvSpPr/>
+          <p:nvPr/>
+        </p:nvSpPr>
+        <p:spPr>
+          <a:xfrm>
+            <a:off x="491700" y="3981148"/>
+            <a:ext cx="300000" cy="300000"/>
+          </a:xfrm>
+          <a:prstGeom prst="ellipse">
+            <a:avLst/>
+          </a:prstGeom>
+          <a:solidFill>
+            <a:srgbClr val="2371FF"/>
+          </a:solidFill>
+          <a:ln>
+            <a:noFill/>
+          </a:ln>
+          <a:effectLst/>
+        </p:spPr>
+        <p:style>
+          <a:lnRef idx="1">
+            <a:schemeClr val="accent1"/>
+          </a:lnRef>
+          <a:fillRef idx="3">
+            <a:schemeClr val="accent1"/>
+          </a:fillRef>
+          <a:effectRef idx="2">
+            <a:schemeClr val="accent1"/>
+          </a:effectRef>
+          <a:fontRef idx="minor">
+            <a:schemeClr val="lt1"/>
+          </a:fontRef>
+        </p:style>
+        <p:txBody>
+          <a:bodyPr rtlCol="0" anchor="ctr"/>
+          <a:lstStyle/>
+          <a:p>
+            <a:pPr algn="ctr"/>
+          </a:p>
+        </p:txBody>
+      </p:sp>
+      <p:sp>
+        <p:nvSpPr>
+          <p:cNvPr id="24" name="TextBox 23"/>
+          <p:cNvSpPr txBox="1"/>
+          <p:nvPr/>
+        </p:nvSpPr>
+        <p:spPr>
+          <a:xfrm>
+            <a:off x="491700" y="3981148"/>
+            <a:ext cx="300000" cy="300000"/>
+          </a:xfrm>
+          <a:prstGeom prst="rect">
+            <a:avLst/>
+          </a:prstGeom>
+          <a:noFill/>
+        </p:spPr>
+        <p:txBody>
+          <a:bodyPr wrap="square" anchor="ctr" lIns="0" rIns="0" tIns="0" bIns="0">
+            <a:spAutoFit/>
+          </a:bodyPr>
+          <a:lstStyle/>
+          <a:p>
+            <a:pPr algn="ctr"/>
+            <a:r>
+              <a:rPr sz="1400" b="1" i="0">
+                <a:solidFill>
+                  <a:srgbClr val="FFFDF8"/>
+                </a:solidFill>
+                <a:latin typeface="Segoe UI Semibold"/>
+              </a:rPr>
+              <a:t>✓</a:t>
+            </a:r>
+          </a:p>
+        </p:txBody>
+      </p:sp>
+      <p:sp>
+        <p:nvSpPr>
+          <p:cNvPr id="25" name="TextBox 24"/>
+          <p:cNvSpPr txBox="1"/>
+          <p:nvPr/>
+        </p:nvSpPr>
+        <p:spPr>
+          <a:xfrm>
+            <a:off x="971700" y="3846148"/>
+            <a:ext cx="7680600" cy="570000"/>
+          </a:xfrm>
+          <a:prstGeom prst="rect">
+            <a:avLst/>
+          </a:prstGeom>
+          <a:noFill/>
+        </p:spPr>
+        <p:txBody>
+          <a:bodyPr wrap="square" anchor="ctr" lIns="0" rIns="0" tIns="0" bIns="0">
+            <a:spAutoFit/>
+          </a:bodyPr>
+          <a:lstStyle/>
+          <a:p>
+            <a:pPr algn="l">
+              <a:lnSpc>
+                <a:spcPct val="105000"/>
+              </a:lnSpc>
+            </a:pPr>
+            <a:r>
+              <a:rPr sz="1300" b="0" i="0">
+                <a:solidFill>
+                  <a:srgbClr val="181C23"/>
+                </a:solidFill>
+                <a:latin typeface="Segoe UI"/>
+              </a:rPr>
+              <a:t>Parabéns! Você concluiu o módulo CY-SE-013 — Supply Chain Security! 🎉</a:t>
+            </a:r>
+          </a:p>
+        </p:txBody>
+      </p:sp>
+      <p:sp>
+        <p:nvSpPr>
+          <p:cNvPr id="26" name="Rectangle 25"/>
+          <p:cNvSpPr/>
+          <p:nvPr/>
+        </p:nvSpPr>
+        <p:spPr>
+          <a:xfrm>
+            <a:off x="311700" y="4843500"/>
+            <a:ext cx="8520600" cy="6000"/>
+          </a:xfrm>
+          <a:prstGeom prst="rect">
+            <a:avLst/>
+          </a:prstGeom>
+          <a:solidFill>
+            <a:srgbClr val="ECEDF3"/>
+          </a:solidFill>
+          <a:ln>
+            <a:noFill/>
+          </a:ln>
+          <a:effectLst/>
+        </p:spPr>
+        <p:style>
+          <a:lnRef idx="1">
+            <a:schemeClr val="accent1"/>
+          </a:lnRef>
+          <a:fillRef idx="3">
+            <a:schemeClr val="accent1"/>
+          </a:fillRef>
+          <a:effectRef idx="2">
+            <a:schemeClr val="accent1"/>
+          </a:effectRef>
+          <a:fontRef idx="minor">
+            <a:schemeClr val="lt1"/>
+          </a:fontRef>
+        </p:style>
+        <p:txBody>
+          <a:bodyPr rtlCol="0" anchor="ctr"/>
+          <a:lstStyle/>
+          <a:p>
+            <a:pPr algn="ctr"/>
+          </a:p>
+        </p:txBody>
+      </p:sp>
+      <p:sp>
+        <p:nvSpPr>
+          <p:cNvPr id="27" name="TextBox 26"/>
+          <p:cNvSpPr txBox="1"/>
+          <p:nvPr/>
+        </p:nvSpPr>
+        <p:spPr>
+          <a:xfrm>
+            <a:off x="311700" y="4883500"/>
+            <a:ext cx="7920600" cy="220000"/>
+          </a:xfrm>
+          <a:prstGeom prst="rect">
+            <a:avLst/>
+          </a:prstGeom>
+          <a:noFill/>
+        </p:spPr>
+        <p:txBody>
+          <a:bodyPr wrap="square" anchor="ctr" lIns="0" rIns="0" tIns="0" bIns="0">
+            <a:spAutoFit/>
+          </a:bodyPr>
+          <a:lstStyle/>
+          <a:p>
+            <a:pPr algn="l"/>
+            <a:r>
+              <a:rPr sz="800" b="0" i="0">
+                <a:solidFill>
+                  <a:srgbClr val="6A707D"/>
+                </a:solidFill>
+                <a:latin typeface="Segoe UI"/>
+              </a:rPr>
+              <a:t>Ada · CY-SE-013 - Supply Chain Security · Concluir Atividades e Preencher Rubricas | Everton J Benedicto</a:t>
+            </a:r>
+          </a:p>
+        </p:txBody>
+      </p:sp>
+      <p:sp>
+        <p:nvSpPr>
+          <p:cNvPr id="28" name="TextBox 27"/>
+          <p:cNvSpPr txBox="1"/>
+          <p:nvPr/>
+        </p:nvSpPr>
+        <p:spPr>
+          <a:xfrm>
+            <a:off x="8332300" y="4883500"/>
+            <a:ext cx="500000" cy="220000"/>
+          </a:xfrm>
+          <a:prstGeom prst="rect">
+            <a:avLst/>
+          </a:prstGeom>
+          <a:noFill/>
+        </p:spPr>
+        <p:txBody>
+          <a:bodyPr wrap="square" anchor="ctr" lIns="0" rIns="0" tIns="0" bIns="0">
+            <a:spAutoFit/>
+          </a:bodyPr>
+          <a:lstStyle/>
+          <a:p>
+            <a:pPr algn="r"/>
+            <a:r>
+              <a:rPr sz="800" b="0" i="0">
+                <a:solidFill>
+                  <a:srgbClr val="2371FF"/>
+                </a:solidFill>
+                <a:latin typeface="Segoe UI Semibold"/>
+              </a:rPr>
+              <a:t>9</a:t>
+            </a:r>
+          </a:p>
+        </p:txBody>
+      </p:sp>
+    </p:spTree>
+  </p:cSld>
+  <p:clrMapOvr>
+    <a:masterClrMapping/>
+  </p:clrMapOvr>
+</p:sld>
+</file>
+
+<file path=ppt/slides/slide11.xml><?xml version="1.0" encoding="utf-8"?>
+<p:sld xmlns:a="http://schemas.openxmlformats.org/drawingml/2006/main" xmlns:p="http://schemas.openxmlformats.org/presentationml/2006/main" xmlns:r="http://schemas.openxmlformats.org/officeDocument/2006/relationships">
+  <p:cSld>
+    <p:spTree>
+      <p:nvGrpSpPr>
+        <p:cNvPr id="1" name=""/>
+        <p:cNvGrpSpPr/>
+        <p:nvPr/>
+      </p:nvGrpSpPr>
+      <p:grpSpPr/>
+      <p:pic>
+        <p:nvPicPr>
+          <p:cNvPr id="2" name="Picture 1" descr="image.png"/>
+          <p:cNvPicPr>
+            <a:picLocks noChangeAspect="1"/>
+          </p:cNvPicPr>
+          <p:nvPr/>
+        </p:nvPicPr>
+        <p:blipFill>
+          <a:blip r:embed="rId2"/>
+          <a:stretch>
+            <a:fillRect/>
+          </a:stretch>
+        </p:blipFill>
+        <p:spPr>
+          <a:xfrm>
+            <a:off x="0" y="0"/>
+            <a:ext cx="9144000" cy="616148"/>
+          </a:xfrm>
+          <a:prstGeom prst="rect">
+            <a:avLst/>
+          </a:prstGeom>
+        </p:spPr>
+      </p:pic>
       <p:pic>
         <p:nvPicPr>
           <p:cNvPr id="3" name="Picture 2" descr="image.png"/>
@@ -10638,7 +11749,7 @@
                 </a:solidFill>
                 <a:latin typeface="Segoe UI Semibold"/>
               </a:rPr>
-              <a:t>AVALIAÇÃO</a:t>
+              <a:t>PROJETO FINAL DO CURSO</a:t>
             </a:r>
           </a:p>
         </p:txBody>
@@ -10673,7 +11784,7 @@
                 </a:solidFill>
                 <a:latin typeface="Segoe UI Semibold"/>
               </a:rPr>
-              <a:t>Como preencher as rubricas</a:t>
+              <a:t>Raio-X da Cadeia de Suprimentos</a:t>
             </a:r>
           </a:p>
         </p:txBody>
@@ -10724,14 +11835,60 @@
       </p:sp>
       <p:sp>
         <p:nvSpPr>
-          <p:cNvPr id="6" name="Oval 5"/>
+          <p:cNvPr id="6" name="Rounded Rectangle 5"/>
           <p:cNvSpPr/>
           <p:nvPr/>
         </p:nvSpPr>
         <p:spPr>
           <a:xfrm>
-            <a:off x="311700" y="1776148"/>
-            <a:ext cx="300000" cy="300000"/>
+            <a:off x="311700" y="1746148"/>
+            <a:ext cx="8520600" cy="363470"/>
+          </a:xfrm>
+          <a:prstGeom prst="roundRect">
+            <a:avLst>
+              <a:gd name="adj" fmla="val 8000"/>
+            </a:avLst>
+          </a:prstGeom>
+          <a:solidFill>
+            <a:srgbClr val="ECEDF3"/>
+          </a:solidFill>
+          <a:ln>
+            <a:noFill/>
+          </a:ln>
+          <a:effectLst/>
+        </p:spPr>
+        <p:style>
+          <a:lnRef idx="1">
+            <a:schemeClr val="accent1"/>
+          </a:lnRef>
+          <a:fillRef idx="3">
+            <a:schemeClr val="accent1"/>
+          </a:fillRef>
+          <a:effectRef idx="2">
+            <a:schemeClr val="accent1"/>
+          </a:effectRef>
+          <a:fontRef idx="minor">
+            <a:schemeClr val="lt1"/>
+          </a:fontRef>
+        </p:style>
+        <p:txBody>
+          <a:bodyPr rtlCol="0" anchor="ctr"/>
+          <a:lstStyle/>
+          <a:p>
+            <a:pPr algn="ctr"/>
+          </a:p>
+        </p:txBody>
+      </p:sp>
+      <p:sp>
+        <p:nvSpPr>
+          <p:cNvPr id="7" name="Oval 6"/>
+          <p:cNvSpPr/>
+          <p:nvPr/>
+        </p:nvSpPr>
+        <p:spPr>
+          <a:xfrm>
+            <a:off x="461700" y="1787883"/>
+            <a:ext cx="280000" cy="280000"/>
           </a:xfrm>
           <a:prstGeom prst="ellipse">
             <a:avLst/>
@@ -10768,14 +11925,14 @@
       </p:sp>
       <p:sp>
         <p:nvSpPr>
-          <p:cNvPr id="7" name="TextBox 6"/>
-          <p:cNvSpPr txBox="1"/>
-          <p:nvPr/>
-        </p:nvSpPr>
-        <p:spPr>
-          <a:xfrm>
-            <a:off x="311700" y="1776148"/>
-            <a:ext cx="300000" cy="300000"/>
+          <p:cNvPr id="8" name="TextBox 7"/>
+          <p:cNvSpPr txBox="1"/>
+          <p:nvPr/>
+        </p:nvSpPr>
+        <p:spPr>
+          <a:xfrm>
+            <a:off x="461700" y="1787883"/>
+            <a:ext cx="280000" cy="280000"/>
           </a:xfrm>
           <a:prstGeom prst="rect">
             <a:avLst/>
@@ -10790,7 +11947,7 @@
           <a:p>
             <a:pPr algn="ctr"/>
             <a:r>
-              <a:rPr sz="1300" b="1" i="0">
+              <a:rPr sz="1200" b="1" i="0">
                 <a:solidFill>
                   <a:srgbClr val="FFFDF8"/>
                 </a:solidFill>
@@ -10803,14 +11960,14 @@
       </p:sp>
       <p:sp>
         <p:nvSpPr>
-          <p:cNvPr id="8" name="TextBox 7"/>
-          <p:cNvSpPr txBox="1"/>
-          <p:nvPr/>
-        </p:nvSpPr>
-        <p:spPr>
-          <a:xfrm>
-            <a:off x="811700" y="1746148"/>
-            <a:ext cx="8020600" cy="496838"/>
+          <p:cNvPr id="9" name="TextBox 8"/>
+          <p:cNvSpPr txBox="1"/>
+          <p:nvPr/>
+        </p:nvSpPr>
+        <p:spPr>
+          <a:xfrm>
+            <a:off x="901700" y="1746148"/>
+            <a:ext cx="7780600" cy="363470"/>
           </a:xfrm>
           <a:prstGeom prst="rect">
             <a:avLst/>
@@ -10825,40 +11982,86 @@
           <a:p>
             <a:pPr algn="l">
               <a:lnSpc>
-                <a:spcPct val="105000"/>
+                <a:spcPct val="100000"/>
               </a:lnSpc>
             </a:pPr>
             <a:r>
-              <a:rPr sz="1400" b="0" i="0">
+              <a:rPr sz="1300" b="0" i="0">
                 <a:solidFill>
                   <a:srgbClr val="181C23"/>
                 </a:solidFill>
                 <a:latin typeface="Segoe UI Semibold"/>
               </a:rPr>
-              <a:t>Autoavaliação: </a:t>
-            </a:r>
-            <a:r>
-              <a:rPr sz="1400" b="0" i="0">
+              <a:t>Política: </a:t>
+            </a:r>
+            <a:r>
+              <a:rPr sz="1300" b="0" i="0">
                 <a:solidFill>
                   <a:srgbClr val="6A707D"/>
                 </a:solidFill>
                 <a:latin typeface="Segoe UI"/>
               </a:rPr>
-              <a:t>reflita sobre o que consegue fazer hoje que não conseguia</a:t>
-            </a:r>
-          </a:p>
-        </p:txBody>
-      </p:sp>
-      <p:sp>
-        <p:nvSpPr>
-          <p:cNvPr id="9" name="Oval 8"/>
+              <a:t>1 regra Rego testada com opa eval — Aulas 1 a 3</a:t>
+            </a:r>
+          </a:p>
+        </p:txBody>
+      </p:sp>
+      <p:sp>
+        <p:nvSpPr>
+          <p:cNvPr id="10" name="Rounded Rectangle 9"/>
           <p:cNvSpPr/>
           <p:nvPr/>
         </p:nvSpPr>
         <p:spPr>
           <a:xfrm>
-            <a:off x="311700" y="2272986"/>
-            <a:ext cx="300000" cy="300000"/>
+            <a:off x="311700" y="2199618"/>
+            <a:ext cx="8520600" cy="363470"/>
+          </a:xfrm>
+          <a:prstGeom prst="roundRect">
+            <a:avLst>
+              <a:gd name="adj" fmla="val 8000"/>
+            </a:avLst>
+          </a:prstGeom>
+          <a:solidFill>
+            <a:srgbClr val="ECEDF3"/>
+          </a:solidFill>
+          <a:ln>
+            <a:noFill/>
+          </a:ln>
+          <a:effectLst/>
+        </p:spPr>
+        <p:style>
+          <a:lnRef idx="1">
+            <a:schemeClr val="accent1"/>
+          </a:lnRef>
+          <a:fillRef idx="3">
+            <a:schemeClr val="accent1"/>
+          </a:fillRef>
+          <a:effectRef idx="2">
+            <a:schemeClr val="accent1"/>
+          </a:effectRef>
+          <a:fontRef idx="minor">
+            <a:schemeClr val="lt1"/>
+          </a:fontRef>
+        </p:style>
+        <p:txBody>
+          <a:bodyPr rtlCol="0" anchor="ctr"/>
+          <a:lstStyle/>
+          <a:p>
+            <a:pPr algn="ctr"/>
+          </a:p>
+        </p:txBody>
+      </p:sp>
+      <p:sp>
+        <p:nvSpPr>
+          <p:cNvPr id="11" name="Oval 10"/>
+          <p:cNvSpPr/>
+          <p:nvPr/>
+        </p:nvSpPr>
+        <p:spPr>
+          <a:xfrm>
+            <a:off x="461700" y="2241353"/>
+            <a:ext cx="280000" cy="280000"/>
           </a:xfrm>
           <a:prstGeom prst="ellipse">
             <a:avLst/>
@@ -10895,14 +12098,14 @@
       </p:sp>
       <p:sp>
         <p:nvSpPr>
-          <p:cNvPr id="10" name="TextBox 9"/>
-          <p:cNvSpPr txBox="1"/>
-          <p:nvPr/>
-        </p:nvSpPr>
-        <p:spPr>
-          <a:xfrm>
-            <a:off x="311700" y="2272986"/>
-            <a:ext cx="300000" cy="300000"/>
+          <p:cNvPr id="12" name="TextBox 11"/>
+          <p:cNvSpPr txBox="1"/>
+          <p:nvPr/>
+        </p:nvSpPr>
+        <p:spPr>
+          <a:xfrm>
+            <a:off x="461700" y="2241353"/>
+            <a:ext cx="280000" cy="280000"/>
           </a:xfrm>
           <a:prstGeom prst="rect">
             <a:avLst/>
@@ -10917,7 +12120,7 @@
           <a:p>
             <a:pPr algn="ctr"/>
             <a:r>
-              <a:rPr sz="1300" b="1" i="0">
+              <a:rPr sz="1200" b="1" i="0">
                 <a:solidFill>
                   <a:srgbClr val="FFFDF8"/>
                 </a:solidFill>
@@ -10930,14 +12133,14 @@
       </p:sp>
       <p:sp>
         <p:nvSpPr>
-          <p:cNvPr id="11" name="TextBox 10"/>
-          <p:cNvSpPr txBox="1"/>
-          <p:nvPr/>
-        </p:nvSpPr>
-        <p:spPr>
-          <a:xfrm>
-            <a:off x="811700" y="2242986"/>
-            <a:ext cx="8020600" cy="496838"/>
+          <p:cNvPr id="13" name="TextBox 12"/>
+          <p:cNvSpPr txBox="1"/>
+          <p:nvPr/>
+        </p:nvSpPr>
+        <p:spPr>
+          <a:xfrm>
+            <a:off x="901700" y="2199618"/>
+            <a:ext cx="7780600" cy="363470"/>
           </a:xfrm>
           <a:prstGeom prst="rect">
             <a:avLst/>
@@ -10952,40 +12155,86 @@
           <a:p>
             <a:pPr algn="l">
               <a:lnSpc>
-                <a:spcPct val="105000"/>
+                <a:spcPct val="100000"/>
               </a:lnSpc>
             </a:pPr>
             <a:r>
-              <a:rPr sz="1400" b="0" i="0">
+              <a:rPr sz="1300" b="0" i="0">
                 <a:solidFill>
                   <a:srgbClr val="181C23"/>
                 </a:solidFill>
                 <a:latin typeface="Segoe UI Semibold"/>
               </a:rPr>
-              <a:t>Critérios: </a:t>
-            </a:r>
-            <a:r>
-              <a:rPr sz="1400" b="0" i="0">
+              <a:t>Inventário: </a:t>
+            </a:r>
+            <a:r>
+              <a:rPr sz="1300" b="0" i="0">
                 <a:solidFill>
                   <a:srgbClr val="6A707D"/>
                 </a:solidFill>
                 <a:latin typeface="Segoe UI"/>
               </a:rPr>
-              <a:t>cada rubrica avalia uma competência específica do módulo</a:t>
-            </a:r>
-          </a:p>
-        </p:txBody>
-      </p:sp>
-      <p:sp>
-        <p:nvSpPr>
-          <p:cNvPr id="12" name="Oval 11"/>
+              <a:t>SBOM com Syft + 1 vulnerabilidade real com Trivy — Aulas 4 e 5</a:t>
+            </a:r>
+          </a:p>
+        </p:txBody>
+      </p:sp>
+      <p:sp>
+        <p:nvSpPr>
+          <p:cNvPr id="14" name="Rounded Rectangle 13"/>
           <p:cNvSpPr/>
           <p:nvPr/>
         </p:nvSpPr>
         <p:spPr>
           <a:xfrm>
-            <a:off x="311700" y="2769824"/>
-            <a:ext cx="300000" cy="300000"/>
+            <a:off x="311700" y="2653088"/>
+            <a:ext cx="8520600" cy="363470"/>
+          </a:xfrm>
+          <a:prstGeom prst="roundRect">
+            <a:avLst>
+              <a:gd name="adj" fmla="val 8000"/>
+            </a:avLst>
+          </a:prstGeom>
+          <a:solidFill>
+            <a:srgbClr val="ECEDF3"/>
+          </a:solidFill>
+          <a:ln>
+            <a:noFill/>
+          </a:ln>
+          <a:effectLst/>
+        </p:spPr>
+        <p:style>
+          <a:lnRef idx="1">
+            <a:schemeClr val="accent1"/>
+          </a:lnRef>
+          <a:fillRef idx="3">
+            <a:schemeClr val="accent1"/>
+          </a:fillRef>
+          <a:effectRef idx="2">
+            <a:schemeClr val="accent1"/>
+          </a:effectRef>
+          <a:fontRef idx="minor">
+            <a:schemeClr val="lt1"/>
+          </a:fontRef>
+        </p:style>
+        <p:txBody>
+          <a:bodyPr rtlCol="0" anchor="ctr"/>
+          <a:lstStyle/>
+          <a:p>
+            <a:pPr algn="ctr"/>
+          </a:p>
+        </p:txBody>
+      </p:sp>
+      <p:sp>
+        <p:nvSpPr>
+          <p:cNvPr id="15" name="Oval 14"/>
+          <p:cNvSpPr/>
+          <p:nvPr/>
+        </p:nvSpPr>
+        <p:spPr>
+          <a:xfrm>
+            <a:off x="461700" y="2694823"/>
+            <a:ext cx="280000" cy="280000"/>
           </a:xfrm>
           <a:prstGeom prst="ellipse">
             <a:avLst/>
@@ -11022,14 +12271,14 @@
       </p:sp>
       <p:sp>
         <p:nvSpPr>
-          <p:cNvPr id="13" name="TextBox 12"/>
-          <p:cNvSpPr txBox="1"/>
-          <p:nvPr/>
-        </p:nvSpPr>
-        <p:spPr>
-          <a:xfrm>
-            <a:off x="311700" y="2769824"/>
-            <a:ext cx="300000" cy="300000"/>
+          <p:cNvPr id="16" name="TextBox 15"/>
+          <p:cNvSpPr txBox="1"/>
+          <p:nvPr/>
+        </p:nvSpPr>
+        <p:spPr>
+          <a:xfrm>
+            <a:off x="461700" y="2694823"/>
+            <a:ext cx="280000" cy="280000"/>
           </a:xfrm>
           <a:prstGeom prst="rect">
             <a:avLst/>
@@ -11044,7 +12293,7 @@
           <a:p>
             <a:pPr algn="ctr"/>
             <a:r>
-              <a:rPr sz="1300" b="1" i="0">
+              <a:rPr sz="1200" b="1" i="0">
                 <a:solidFill>
                   <a:srgbClr val="FFFDF8"/>
                 </a:solidFill>
@@ -11057,14 +12306,14 @@
       </p:sp>
       <p:sp>
         <p:nvSpPr>
-          <p:cNvPr id="14" name="TextBox 13"/>
-          <p:cNvSpPr txBox="1"/>
-          <p:nvPr/>
-        </p:nvSpPr>
-        <p:spPr>
-          <a:xfrm>
-            <a:off x="811700" y="2739824"/>
-            <a:ext cx="8020600" cy="496838"/>
+          <p:cNvPr id="17" name="TextBox 16"/>
+          <p:cNvSpPr txBox="1"/>
+          <p:nvPr/>
+        </p:nvSpPr>
+        <p:spPr>
+          <a:xfrm>
+            <a:off x="901700" y="2653088"/>
+            <a:ext cx="7780600" cy="363470"/>
           </a:xfrm>
           <a:prstGeom prst="rect">
             <a:avLst/>
@@ -11079,40 +12328,86 @@
           <a:p>
             <a:pPr algn="l">
               <a:lnSpc>
-                <a:spcPct val="105000"/>
+                <a:spcPct val="100000"/>
               </a:lnSpc>
             </a:pPr>
             <a:r>
-              <a:rPr sz="1400" b="0" i="0">
+              <a:rPr sz="1300" b="0" i="0">
                 <a:solidFill>
                   <a:srgbClr val="181C23"/>
                 </a:solidFill>
                 <a:latin typeface="Segoe UI Semibold"/>
               </a:rPr>
-              <a:t>Honestidade: </a:t>
-            </a:r>
-            <a:r>
-              <a:rPr sz="1400" b="0" i="0">
+              <a:t>Cadeia: </a:t>
+            </a:r>
+            <a:r>
+              <a:rPr sz="1300" b="0" i="0">
                 <a:solidFill>
                   <a:srgbClr val="6A707D"/>
                 </a:solidFill>
                 <a:latin typeface="Segoe UI"/>
               </a:rPr>
-              <a:t>avalie com sinceridade para evoluir de verdade</a:t>
-            </a:r>
-          </a:p>
-        </p:txBody>
-      </p:sp>
-      <p:sp>
-        <p:nvSpPr>
-          <p:cNvPr id="15" name="Oval 14"/>
+              <a:t>assinar com Cosign keyless, ligado a um ataque real — Aulas 6 e 7</a:t>
+            </a:r>
+          </a:p>
+        </p:txBody>
+      </p:sp>
+      <p:sp>
+        <p:nvSpPr>
+          <p:cNvPr id="18" name="Rounded Rectangle 17"/>
           <p:cNvSpPr/>
           <p:nvPr/>
         </p:nvSpPr>
         <p:spPr>
           <a:xfrm>
-            <a:off x="311700" y="3266662"/>
-            <a:ext cx="300000" cy="300000"/>
+            <a:off x="311700" y="3106558"/>
+            <a:ext cx="8520600" cy="363470"/>
+          </a:xfrm>
+          <a:prstGeom prst="roundRect">
+            <a:avLst>
+              <a:gd name="adj" fmla="val 8000"/>
+            </a:avLst>
+          </a:prstGeom>
+          <a:solidFill>
+            <a:srgbClr val="ECEDF3"/>
+          </a:solidFill>
+          <a:ln>
+            <a:noFill/>
+          </a:ln>
+          <a:effectLst/>
+        </p:spPr>
+        <p:style>
+          <a:lnRef idx="1">
+            <a:schemeClr val="accent1"/>
+          </a:lnRef>
+          <a:fillRef idx="3">
+            <a:schemeClr val="accent1"/>
+          </a:fillRef>
+          <a:effectRef idx="2">
+            <a:schemeClr val="accent1"/>
+          </a:effectRef>
+          <a:fontRef idx="minor">
+            <a:schemeClr val="lt1"/>
+          </a:fontRef>
+        </p:style>
+        <p:txBody>
+          <a:bodyPr rtlCol="0" anchor="ctr"/>
+          <a:lstStyle/>
+          <a:p>
+            <a:pPr algn="ctr"/>
+          </a:p>
+        </p:txBody>
+      </p:sp>
+      <p:sp>
+        <p:nvSpPr>
+          <p:cNvPr id="19" name="Oval 18"/>
+          <p:cNvSpPr/>
+          <p:nvPr/>
+        </p:nvSpPr>
+        <p:spPr>
+          <a:xfrm>
+            <a:off x="461700" y="3148293"/>
+            <a:ext cx="280000" cy="280000"/>
           </a:xfrm>
           <a:prstGeom prst="ellipse">
             <a:avLst/>
@@ -11149,14 +12444,14 @@
       </p:sp>
       <p:sp>
         <p:nvSpPr>
-          <p:cNvPr id="16" name="TextBox 15"/>
-          <p:cNvSpPr txBox="1"/>
-          <p:nvPr/>
-        </p:nvSpPr>
-        <p:spPr>
-          <a:xfrm>
-            <a:off x="311700" y="3266662"/>
-            <a:ext cx="300000" cy="300000"/>
+          <p:cNvPr id="20" name="TextBox 19"/>
+          <p:cNvSpPr txBox="1"/>
+          <p:nvPr/>
+        </p:nvSpPr>
+        <p:spPr>
+          <a:xfrm>
+            <a:off x="461700" y="3148293"/>
+            <a:ext cx="280000" cy="280000"/>
           </a:xfrm>
           <a:prstGeom prst="rect">
             <a:avLst/>
@@ -11171,7 +12466,7 @@
           <a:p>
             <a:pPr algn="ctr"/>
             <a:r>
-              <a:rPr sz="1300" b="1" i="0">
+              <a:rPr sz="1200" b="1" i="0">
                 <a:solidFill>
                   <a:srgbClr val="FFFDF8"/>
                 </a:solidFill>
@@ -11184,14 +12479,14 @@
       </p:sp>
       <p:sp>
         <p:nvSpPr>
-          <p:cNvPr id="17" name="TextBox 16"/>
-          <p:cNvSpPr txBox="1"/>
-          <p:nvPr/>
-        </p:nvSpPr>
-        <p:spPr>
-          <a:xfrm>
-            <a:off x="811700" y="3236662"/>
-            <a:ext cx="8020600" cy="496838"/>
+          <p:cNvPr id="21" name="TextBox 20"/>
+          <p:cNvSpPr txBox="1"/>
+          <p:nvPr/>
+        </p:nvSpPr>
+        <p:spPr>
+          <a:xfrm>
+            <a:off x="901700" y="3106558"/>
+            <a:ext cx="7780600" cy="363470"/>
           </a:xfrm>
           <a:prstGeom prst="rect">
             <a:avLst/>
@@ -11206,40 +12501,213 @@
           <a:p>
             <a:pPr algn="l">
               <a:lnSpc>
-                <a:spcPct val="105000"/>
+                <a:spcPct val="100000"/>
               </a:lnSpc>
             </a:pPr>
             <a:r>
-              <a:rPr sz="1400" b="0" i="0">
+              <a:rPr sz="1300" b="0" i="0">
                 <a:solidFill>
                   <a:srgbClr val="181C23"/>
                 </a:solidFill>
                 <a:latin typeface="Segoe UI Semibold"/>
               </a:rPr>
-              <a:t>Feedback: </a:t>
-            </a:r>
-            <a:r>
-              <a:rPr sz="1400" b="0" i="0">
+              <a:t>Compliance: </a:t>
+            </a:r>
+            <a:r>
+              <a:rPr sz="1300" b="0" i="0">
                 <a:solidFill>
                   <a:srgbClr val="6A707D"/>
                 </a:solidFill>
                 <a:latin typeface="Segoe UI"/>
               </a:rPr>
-              <a:t>o que funcionou e o que mudar no módulo</a:t>
-            </a:r>
-          </a:p>
-        </p:txBody>
-      </p:sp>
-      <p:sp>
-        <p:nvSpPr>
-          <p:cNvPr id="18" name="Rounded Rectangle 17"/>
+              <a:t>meia página: que evidência eu teria se fosse atacado? — Aula 8</a:t>
+            </a:r>
+          </a:p>
+        </p:txBody>
+      </p:sp>
+      <p:sp>
+        <p:nvSpPr>
+          <p:cNvPr id="22" name="Rounded Rectangle 21"/>
           <p:cNvSpPr/>
           <p:nvPr/>
         </p:nvSpPr>
         <p:spPr>
           <a:xfrm>
-            <a:off x="311700" y="3883500"/>
-            <a:ext cx="8520600" cy="900000"/>
+            <a:off x="311700" y="3560028"/>
+            <a:ext cx="8520600" cy="363470"/>
+          </a:xfrm>
+          <a:prstGeom prst="roundRect">
+            <a:avLst>
+              <a:gd name="adj" fmla="val 8000"/>
+            </a:avLst>
+          </a:prstGeom>
+          <a:solidFill>
+            <a:srgbClr val="ECEDF3"/>
+          </a:solidFill>
+          <a:ln>
+            <a:noFill/>
+          </a:ln>
+          <a:effectLst/>
+        </p:spPr>
+        <p:style>
+          <a:lnRef idx="1">
+            <a:schemeClr val="accent1"/>
+          </a:lnRef>
+          <a:fillRef idx="3">
+            <a:schemeClr val="accent1"/>
+          </a:fillRef>
+          <a:effectRef idx="2">
+            <a:schemeClr val="accent1"/>
+          </a:effectRef>
+          <a:fontRef idx="minor">
+            <a:schemeClr val="lt1"/>
+          </a:fontRef>
+        </p:style>
+        <p:txBody>
+          <a:bodyPr rtlCol="0" anchor="ctr"/>
+          <a:lstStyle/>
+          <a:p>
+            <a:pPr algn="ctr"/>
+          </a:p>
+        </p:txBody>
+      </p:sp>
+      <p:sp>
+        <p:nvSpPr>
+          <p:cNvPr id="23" name="Oval 22"/>
+          <p:cNvSpPr/>
+          <p:nvPr/>
+        </p:nvSpPr>
+        <p:spPr>
+          <a:xfrm>
+            <a:off x="461700" y="3601763"/>
+            <a:ext cx="280000" cy="280000"/>
+          </a:xfrm>
+          <a:prstGeom prst="ellipse">
+            <a:avLst/>
+          </a:prstGeom>
+          <a:solidFill>
+            <a:srgbClr val="2371FF"/>
+          </a:solidFill>
+          <a:ln>
+            <a:noFill/>
+          </a:ln>
+          <a:effectLst/>
+        </p:spPr>
+        <p:style>
+          <a:lnRef idx="1">
+            <a:schemeClr val="accent1"/>
+          </a:lnRef>
+          <a:fillRef idx="3">
+            <a:schemeClr val="accent1"/>
+          </a:fillRef>
+          <a:effectRef idx="2">
+            <a:schemeClr val="accent1"/>
+          </a:effectRef>
+          <a:fontRef idx="minor">
+            <a:schemeClr val="lt1"/>
+          </a:fontRef>
+        </p:style>
+        <p:txBody>
+          <a:bodyPr rtlCol="0" anchor="ctr"/>
+          <a:lstStyle/>
+          <a:p>
+            <a:pPr algn="ctr"/>
+          </a:p>
+        </p:txBody>
+      </p:sp>
+      <p:sp>
+        <p:nvSpPr>
+          <p:cNvPr id="24" name="TextBox 23"/>
+          <p:cNvSpPr txBox="1"/>
+          <p:nvPr/>
+        </p:nvSpPr>
+        <p:spPr>
+          <a:xfrm>
+            <a:off x="461700" y="3601763"/>
+            <a:ext cx="280000" cy="280000"/>
+          </a:xfrm>
+          <a:prstGeom prst="rect">
+            <a:avLst/>
+          </a:prstGeom>
+          <a:noFill/>
+        </p:spPr>
+        <p:txBody>
+          <a:bodyPr wrap="square" anchor="ctr" lIns="0" rIns="0" tIns="0" bIns="0">
+            <a:spAutoFit/>
+          </a:bodyPr>
+          <a:lstStyle/>
+          <a:p>
+            <a:pPr algn="ctr"/>
+            <a:r>
+              <a:rPr sz="1200" b="1" i="0">
+                <a:solidFill>
+                  <a:srgbClr val="FFFDF8"/>
+                </a:solidFill>
+                <a:latin typeface="Segoe UI Semibold"/>
+              </a:rPr>
+              <a:t>5</a:t>
+            </a:r>
+          </a:p>
+        </p:txBody>
+      </p:sp>
+      <p:sp>
+        <p:nvSpPr>
+          <p:cNvPr id="25" name="TextBox 24"/>
+          <p:cNvSpPr txBox="1"/>
+          <p:nvPr/>
+        </p:nvSpPr>
+        <p:spPr>
+          <a:xfrm>
+            <a:off x="901700" y="3560028"/>
+            <a:ext cx="7780600" cy="363470"/>
+          </a:xfrm>
+          <a:prstGeom prst="rect">
+            <a:avLst/>
+          </a:prstGeom>
+          <a:noFill/>
+        </p:spPr>
+        <p:txBody>
+          <a:bodyPr wrap="square" anchor="ctr" lIns="0" rIns="0" tIns="0" bIns="0">
+            <a:spAutoFit/>
+          </a:bodyPr>
+          <a:lstStyle/>
+          <a:p>
+            <a:pPr algn="l">
+              <a:lnSpc>
+                <a:spcPct val="100000"/>
+              </a:lnSpc>
+            </a:pPr>
+            <a:r>
+              <a:rPr sz="1300" b="0" i="0">
+                <a:solidFill>
+                  <a:srgbClr val="181C23"/>
+                </a:solidFill>
+                <a:latin typeface="Segoe UI Semibold"/>
+              </a:rPr>
+              <a:t>Apresentação: </a:t>
+            </a:r>
+            <a:r>
+              <a:rPr sz="1300" b="0" i="0">
+                <a:solidFill>
+                  <a:srgbClr val="6A707D"/>
+                </a:solidFill>
+                <a:latin typeface="Segoe UI"/>
+              </a:rPr>
+              <a:t>5 minutos mostrando o antes e depois do bloqueio</a:t>
+            </a:r>
+          </a:p>
+        </p:txBody>
+      </p:sp>
+      <p:sp>
+        <p:nvSpPr>
+          <p:cNvPr id="26" name="Rounded Rectangle 25"/>
+          <p:cNvSpPr/>
+          <p:nvPr/>
+        </p:nvSpPr>
+        <p:spPr>
+          <a:xfrm>
+            <a:off x="311700" y="4163500"/>
+            <a:ext cx="8520600" cy="620000"/>
           </a:xfrm>
           <a:prstGeom prst="roundRect">
             <a:avLst>
@@ -11278,14 +12746,14 @@
       </p:sp>
       <p:sp>
         <p:nvSpPr>
-          <p:cNvPr id="19" name="Rounded Rectangle 18"/>
+          <p:cNvPr id="27" name="Rounded Rectangle 26"/>
           <p:cNvSpPr/>
           <p:nvPr/>
         </p:nvSpPr>
         <p:spPr>
           <a:xfrm>
-            <a:off x="311700" y="3883500"/>
-            <a:ext cx="70000" cy="900000"/>
+            <a:off x="311700" y="4163500"/>
+            <a:ext cx="70000" cy="620000"/>
           </a:xfrm>
           <a:prstGeom prst="roundRect">
             <a:avLst>
@@ -11324,14 +12792,14 @@
       </p:sp>
       <p:sp>
         <p:nvSpPr>
-          <p:cNvPr id="20" name="TextBox 19"/>
-          <p:cNvSpPr txBox="1"/>
-          <p:nvPr/>
-        </p:nvSpPr>
-        <p:spPr>
-          <a:xfrm>
-            <a:off x="511700" y="3973500"/>
-            <a:ext cx="8120600" cy="240000"/>
+          <p:cNvPr id="28" name="TextBox 27"/>
+          <p:cNvSpPr txBox="1"/>
+          <p:nvPr/>
+        </p:nvSpPr>
+        <p:spPr>
+          <a:xfrm>
+            <a:off x="511700" y="4233500"/>
+            <a:ext cx="8120600" cy="220000"/>
           </a:xfrm>
           <a:prstGeom prst="rect">
             <a:avLst/>
@@ -11352,21 +12820,21 @@
                 </a:solidFill>
                 <a:latin typeface="Segoe UI Semibold"/>
               </a:rPr>
-              <a:t>💡 ANALOGIA</a:t>
-            </a:r>
-          </a:p>
-        </p:txBody>
-      </p:sp>
-      <p:sp>
-        <p:nvSpPr>
-          <p:cNvPr id="21" name="TextBox 20"/>
-          <p:cNvSpPr txBox="1"/>
-          <p:nvPr/>
-        </p:nvSpPr>
-        <p:spPr>
-          <a:xfrm>
-            <a:off x="511700" y="4223500"/>
-            <a:ext cx="8120600" cy="500000"/>
+              <a:t>✅ ENTREGÁVEL</a:t>
+            </a:r>
+          </a:p>
+        </p:txBody>
+      </p:sp>
+      <p:sp>
+        <p:nvSpPr>
+          <p:cNvPr id="29" name="TextBox 28"/>
+          <p:cNvSpPr txBox="1"/>
+          <p:nvPr/>
+        </p:nvSpPr>
+        <p:spPr>
+          <a:xfrm>
+            <a:off x="511700" y="4453500"/>
+            <a:ext cx="8120600" cy="300000"/>
           </a:xfrm>
           <a:prstGeom prst="rect">
             <a:avLst/>
@@ -11381,24 +12849,24 @@
           <a:p>
             <a:pPr algn="l">
               <a:lnSpc>
-                <a:spcPct val="110000"/>
+                <a:spcPct val="105000"/>
               </a:lnSpc>
             </a:pPr>
             <a:r>
-              <a:rPr sz="1300" b="0" i="1">
+              <a:rPr sz="1200" b="0" i="1">
                 <a:solidFill>
                   <a:srgbClr val="181C23"/>
                 </a:solidFill>
                 <a:latin typeface="Segoe UI"/>
               </a:rPr>
-              <a:t>A rubrica é o SBOM do seu aprendizado: lista o que você tem, em que versão, e onde ainda há 'CVE' para corrigir.</a:t>
-            </a:r>
-          </a:p>
-        </p:txBody>
-      </p:sp>
-      <p:sp>
-        <p:nvSpPr>
-          <p:cNvPr id="22" name="Rectangle 21"/>
+              <a:t>Pasta com Dockerfile, policy Rego, SBOM, print do Trivy e assinatura Cosign. Avaliação: checklist binário de 5 itens, sem rubrica de 0-100.</a:t>
+            </a:r>
+          </a:p>
+        </p:txBody>
+      </p:sp>
+      <p:sp>
+        <p:nvSpPr>
+          <p:cNvPr id="30" name="Rectangle 29"/>
           <p:cNvSpPr/>
           <p:nvPr/>
         </p:nvSpPr>
@@ -11442,7 +12910,7 @@
       </p:sp>
       <p:sp>
         <p:nvSpPr>
-          <p:cNvPr id="23" name="TextBox 22"/>
+          <p:cNvPr id="31" name="TextBox 30"/>
           <p:cNvSpPr txBox="1"/>
           <p:nvPr/>
         </p:nvSpPr>
@@ -11477,7 +12945,7 @@
       </p:sp>
       <p:sp>
         <p:nvSpPr>
-          <p:cNvPr id="24" name="TextBox 23"/>
+          <p:cNvPr id="32" name="TextBox 31"/>
           <p:cNvSpPr txBox="1"/>
           <p:nvPr/>
         </p:nvSpPr>
@@ -11582,7 +13050,7 @@
                 </a:solidFill>
                 <a:latin typeface="Segoe UI Semibold"/>
               </a:rPr>
-              <a:t>BANCA</a:t>
+              <a:t>AVALIAÇÃO</a:t>
             </a:r>
           </a:p>
         </p:txBody>
@@ -11617,7 +13085,7 @@
                 </a:solidFill>
                 <a:latin typeface="Segoe UI Semibold"/>
               </a:rPr>
-              <a:t>Apresentações do projeto final</a:t>
+              <a:t>Como preencher as rubricas</a:t>
             </a:r>
           </a:p>
         </p:txBody>
@@ -11668,19 +13136,691 @@
       </p:sp>
       <p:sp>
         <p:nvSpPr>
-          <p:cNvPr id="6" name="Rounded Rectangle 5"/>
+          <p:cNvPr id="6" name="Oval 5"/>
           <p:cNvSpPr/>
           <p:nvPr/>
         </p:nvSpPr>
         <p:spPr>
           <a:xfrm>
-            <a:off x="311700" y="1746148"/>
-            <a:ext cx="8520600" cy="363470"/>
+            <a:off x="311700" y="1776148"/>
+            <a:ext cx="300000" cy="300000"/>
+          </a:xfrm>
+          <a:prstGeom prst="ellipse">
+            <a:avLst/>
+          </a:prstGeom>
+          <a:solidFill>
+            <a:srgbClr val="2371FF"/>
+          </a:solidFill>
+          <a:ln>
+            <a:noFill/>
+          </a:ln>
+          <a:effectLst/>
+        </p:spPr>
+        <p:style>
+          <a:lnRef idx="1">
+            <a:schemeClr val="accent1"/>
+          </a:lnRef>
+          <a:fillRef idx="3">
+            <a:schemeClr val="accent1"/>
+          </a:fillRef>
+          <a:effectRef idx="2">
+            <a:schemeClr val="accent1"/>
+          </a:effectRef>
+          <a:fontRef idx="minor">
+            <a:schemeClr val="lt1"/>
+          </a:fontRef>
+        </p:style>
+        <p:txBody>
+          <a:bodyPr rtlCol="0" anchor="ctr"/>
+          <a:lstStyle/>
+          <a:p>
+            <a:pPr algn="ctr"/>
+          </a:p>
+        </p:txBody>
+      </p:sp>
+      <p:sp>
+        <p:nvSpPr>
+          <p:cNvPr id="7" name="TextBox 6"/>
+          <p:cNvSpPr txBox="1"/>
+          <p:nvPr/>
+        </p:nvSpPr>
+        <p:spPr>
+          <a:xfrm>
+            <a:off x="311700" y="1776148"/>
+            <a:ext cx="300000" cy="300000"/>
+          </a:xfrm>
+          <a:prstGeom prst="rect">
+            <a:avLst/>
+          </a:prstGeom>
+          <a:noFill/>
+        </p:spPr>
+        <p:txBody>
+          <a:bodyPr wrap="square" anchor="ctr" lIns="0" rIns="0" tIns="0" bIns="0">
+            <a:spAutoFit/>
+          </a:bodyPr>
+          <a:lstStyle/>
+          <a:p>
+            <a:pPr algn="ctr"/>
+            <a:r>
+              <a:rPr sz="1300" b="1" i="0">
+                <a:solidFill>
+                  <a:srgbClr val="FFFDF8"/>
+                </a:solidFill>
+                <a:latin typeface="Segoe UI Semibold"/>
+              </a:rPr>
+              <a:t>1</a:t>
+            </a:r>
+          </a:p>
+        </p:txBody>
+      </p:sp>
+      <p:sp>
+        <p:nvSpPr>
+          <p:cNvPr id="8" name="TextBox 7"/>
+          <p:cNvSpPr txBox="1"/>
+          <p:nvPr/>
+        </p:nvSpPr>
+        <p:spPr>
+          <a:xfrm>
+            <a:off x="811700" y="1746148"/>
+            <a:ext cx="8020600" cy="496838"/>
+          </a:xfrm>
+          <a:prstGeom prst="rect">
+            <a:avLst/>
+          </a:prstGeom>
+          <a:noFill/>
+        </p:spPr>
+        <p:txBody>
+          <a:bodyPr wrap="square" anchor="ctr" lIns="0" rIns="0" tIns="0" bIns="0">
+            <a:spAutoFit/>
+          </a:bodyPr>
+          <a:lstStyle/>
+          <a:p>
+            <a:pPr algn="l">
+              <a:lnSpc>
+                <a:spcPct val="105000"/>
+              </a:lnSpc>
+            </a:pPr>
+            <a:r>
+              <a:rPr sz="1400" b="0" i="0">
+                <a:solidFill>
+                  <a:srgbClr val="181C23"/>
+                </a:solidFill>
+                <a:latin typeface="Segoe UI Semibold"/>
+              </a:rPr>
+              <a:t>Autoavaliação: </a:t>
+            </a:r>
+            <a:r>
+              <a:rPr sz="1400" b="0" i="0">
+                <a:solidFill>
+                  <a:srgbClr val="6A707D"/>
+                </a:solidFill>
+                <a:latin typeface="Segoe UI"/>
+              </a:rPr>
+              <a:t>reflita sobre o que consegue fazer hoje que não conseguia</a:t>
+            </a:r>
+          </a:p>
+        </p:txBody>
+      </p:sp>
+      <p:sp>
+        <p:nvSpPr>
+          <p:cNvPr id="9" name="Oval 8"/>
+          <p:cNvSpPr/>
+          <p:nvPr/>
+        </p:nvSpPr>
+        <p:spPr>
+          <a:xfrm>
+            <a:off x="311700" y="2272986"/>
+            <a:ext cx="300000" cy="300000"/>
+          </a:xfrm>
+          <a:prstGeom prst="ellipse">
+            <a:avLst/>
+          </a:prstGeom>
+          <a:solidFill>
+            <a:srgbClr val="2371FF"/>
+          </a:solidFill>
+          <a:ln>
+            <a:noFill/>
+          </a:ln>
+          <a:effectLst/>
+        </p:spPr>
+        <p:style>
+          <a:lnRef idx="1">
+            <a:schemeClr val="accent1"/>
+          </a:lnRef>
+          <a:fillRef idx="3">
+            <a:schemeClr val="accent1"/>
+          </a:fillRef>
+          <a:effectRef idx="2">
+            <a:schemeClr val="accent1"/>
+          </a:effectRef>
+          <a:fontRef idx="minor">
+            <a:schemeClr val="lt1"/>
+          </a:fontRef>
+        </p:style>
+        <p:txBody>
+          <a:bodyPr rtlCol="0" anchor="ctr"/>
+          <a:lstStyle/>
+          <a:p>
+            <a:pPr algn="ctr"/>
+          </a:p>
+        </p:txBody>
+      </p:sp>
+      <p:sp>
+        <p:nvSpPr>
+          <p:cNvPr id="10" name="TextBox 9"/>
+          <p:cNvSpPr txBox="1"/>
+          <p:nvPr/>
+        </p:nvSpPr>
+        <p:spPr>
+          <a:xfrm>
+            <a:off x="311700" y="2272986"/>
+            <a:ext cx="300000" cy="300000"/>
+          </a:xfrm>
+          <a:prstGeom prst="rect">
+            <a:avLst/>
+          </a:prstGeom>
+          <a:noFill/>
+        </p:spPr>
+        <p:txBody>
+          <a:bodyPr wrap="square" anchor="ctr" lIns="0" rIns="0" tIns="0" bIns="0">
+            <a:spAutoFit/>
+          </a:bodyPr>
+          <a:lstStyle/>
+          <a:p>
+            <a:pPr algn="ctr"/>
+            <a:r>
+              <a:rPr sz="1300" b="1" i="0">
+                <a:solidFill>
+                  <a:srgbClr val="FFFDF8"/>
+                </a:solidFill>
+                <a:latin typeface="Segoe UI Semibold"/>
+              </a:rPr>
+              <a:t>2</a:t>
+            </a:r>
+          </a:p>
+        </p:txBody>
+      </p:sp>
+      <p:sp>
+        <p:nvSpPr>
+          <p:cNvPr id="11" name="TextBox 10"/>
+          <p:cNvSpPr txBox="1"/>
+          <p:nvPr/>
+        </p:nvSpPr>
+        <p:spPr>
+          <a:xfrm>
+            <a:off x="811700" y="2242986"/>
+            <a:ext cx="8020600" cy="496838"/>
+          </a:xfrm>
+          <a:prstGeom prst="rect">
+            <a:avLst/>
+          </a:prstGeom>
+          <a:noFill/>
+        </p:spPr>
+        <p:txBody>
+          <a:bodyPr wrap="square" anchor="ctr" lIns="0" rIns="0" tIns="0" bIns="0">
+            <a:spAutoFit/>
+          </a:bodyPr>
+          <a:lstStyle/>
+          <a:p>
+            <a:pPr algn="l">
+              <a:lnSpc>
+                <a:spcPct val="105000"/>
+              </a:lnSpc>
+            </a:pPr>
+            <a:r>
+              <a:rPr sz="1400" b="0" i="0">
+                <a:solidFill>
+                  <a:srgbClr val="181C23"/>
+                </a:solidFill>
+                <a:latin typeface="Segoe UI Semibold"/>
+              </a:rPr>
+              <a:t>Critérios: </a:t>
+            </a:r>
+            <a:r>
+              <a:rPr sz="1400" b="0" i="0">
+                <a:solidFill>
+                  <a:srgbClr val="6A707D"/>
+                </a:solidFill>
+                <a:latin typeface="Segoe UI"/>
+              </a:rPr>
+              <a:t>cada rubrica avalia uma competência específica do módulo</a:t>
+            </a:r>
+          </a:p>
+        </p:txBody>
+      </p:sp>
+      <p:sp>
+        <p:nvSpPr>
+          <p:cNvPr id="12" name="Oval 11"/>
+          <p:cNvSpPr/>
+          <p:nvPr/>
+        </p:nvSpPr>
+        <p:spPr>
+          <a:xfrm>
+            <a:off x="311700" y="2769824"/>
+            <a:ext cx="300000" cy="300000"/>
+          </a:xfrm>
+          <a:prstGeom prst="ellipse">
+            <a:avLst/>
+          </a:prstGeom>
+          <a:solidFill>
+            <a:srgbClr val="2371FF"/>
+          </a:solidFill>
+          <a:ln>
+            <a:noFill/>
+          </a:ln>
+          <a:effectLst/>
+        </p:spPr>
+        <p:style>
+          <a:lnRef idx="1">
+            <a:schemeClr val="accent1"/>
+          </a:lnRef>
+          <a:fillRef idx="3">
+            <a:schemeClr val="accent1"/>
+          </a:fillRef>
+          <a:effectRef idx="2">
+            <a:schemeClr val="accent1"/>
+          </a:effectRef>
+          <a:fontRef idx="minor">
+            <a:schemeClr val="lt1"/>
+          </a:fontRef>
+        </p:style>
+        <p:txBody>
+          <a:bodyPr rtlCol="0" anchor="ctr"/>
+          <a:lstStyle/>
+          <a:p>
+            <a:pPr algn="ctr"/>
+          </a:p>
+        </p:txBody>
+      </p:sp>
+      <p:sp>
+        <p:nvSpPr>
+          <p:cNvPr id="13" name="TextBox 12"/>
+          <p:cNvSpPr txBox="1"/>
+          <p:nvPr/>
+        </p:nvSpPr>
+        <p:spPr>
+          <a:xfrm>
+            <a:off x="311700" y="2769824"/>
+            <a:ext cx="300000" cy="300000"/>
+          </a:xfrm>
+          <a:prstGeom prst="rect">
+            <a:avLst/>
+          </a:prstGeom>
+          <a:noFill/>
+        </p:spPr>
+        <p:txBody>
+          <a:bodyPr wrap="square" anchor="ctr" lIns="0" rIns="0" tIns="0" bIns="0">
+            <a:spAutoFit/>
+          </a:bodyPr>
+          <a:lstStyle/>
+          <a:p>
+            <a:pPr algn="ctr"/>
+            <a:r>
+              <a:rPr sz="1300" b="1" i="0">
+                <a:solidFill>
+                  <a:srgbClr val="FFFDF8"/>
+                </a:solidFill>
+                <a:latin typeface="Segoe UI Semibold"/>
+              </a:rPr>
+              <a:t>3</a:t>
+            </a:r>
+          </a:p>
+        </p:txBody>
+      </p:sp>
+      <p:sp>
+        <p:nvSpPr>
+          <p:cNvPr id="14" name="TextBox 13"/>
+          <p:cNvSpPr txBox="1"/>
+          <p:nvPr/>
+        </p:nvSpPr>
+        <p:spPr>
+          <a:xfrm>
+            <a:off x="811700" y="2739824"/>
+            <a:ext cx="8020600" cy="496838"/>
+          </a:xfrm>
+          <a:prstGeom prst="rect">
+            <a:avLst/>
+          </a:prstGeom>
+          <a:noFill/>
+        </p:spPr>
+        <p:txBody>
+          <a:bodyPr wrap="square" anchor="ctr" lIns="0" rIns="0" tIns="0" bIns="0">
+            <a:spAutoFit/>
+          </a:bodyPr>
+          <a:lstStyle/>
+          <a:p>
+            <a:pPr algn="l">
+              <a:lnSpc>
+                <a:spcPct val="105000"/>
+              </a:lnSpc>
+            </a:pPr>
+            <a:r>
+              <a:rPr sz="1400" b="0" i="0">
+                <a:solidFill>
+                  <a:srgbClr val="181C23"/>
+                </a:solidFill>
+                <a:latin typeface="Segoe UI Semibold"/>
+              </a:rPr>
+              <a:t>Honestidade: </a:t>
+            </a:r>
+            <a:r>
+              <a:rPr sz="1400" b="0" i="0">
+                <a:solidFill>
+                  <a:srgbClr val="6A707D"/>
+                </a:solidFill>
+                <a:latin typeface="Segoe UI"/>
+              </a:rPr>
+              <a:t>avalie com sinceridade para evoluir de verdade</a:t>
+            </a:r>
+          </a:p>
+        </p:txBody>
+      </p:sp>
+      <p:sp>
+        <p:nvSpPr>
+          <p:cNvPr id="15" name="Oval 14"/>
+          <p:cNvSpPr/>
+          <p:nvPr/>
+        </p:nvSpPr>
+        <p:spPr>
+          <a:xfrm>
+            <a:off x="311700" y="3266662"/>
+            <a:ext cx="300000" cy="300000"/>
+          </a:xfrm>
+          <a:prstGeom prst="ellipse">
+            <a:avLst/>
+          </a:prstGeom>
+          <a:solidFill>
+            <a:srgbClr val="2371FF"/>
+          </a:solidFill>
+          <a:ln>
+            <a:noFill/>
+          </a:ln>
+          <a:effectLst/>
+        </p:spPr>
+        <p:style>
+          <a:lnRef idx="1">
+            <a:schemeClr val="accent1"/>
+          </a:lnRef>
+          <a:fillRef idx="3">
+            <a:schemeClr val="accent1"/>
+          </a:fillRef>
+          <a:effectRef idx="2">
+            <a:schemeClr val="accent1"/>
+          </a:effectRef>
+          <a:fontRef idx="minor">
+            <a:schemeClr val="lt1"/>
+          </a:fontRef>
+        </p:style>
+        <p:txBody>
+          <a:bodyPr rtlCol="0" anchor="ctr"/>
+          <a:lstStyle/>
+          <a:p>
+            <a:pPr algn="ctr"/>
+          </a:p>
+        </p:txBody>
+      </p:sp>
+      <p:sp>
+        <p:nvSpPr>
+          <p:cNvPr id="16" name="TextBox 15"/>
+          <p:cNvSpPr txBox="1"/>
+          <p:nvPr/>
+        </p:nvSpPr>
+        <p:spPr>
+          <a:xfrm>
+            <a:off x="311700" y="3266662"/>
+            <a:ext cx="300000" cy="300000"/>
+          </a:xfrm>
+          <a:prstGeom prst="rect">
+            <a:avLst/>
+          </a:prstGeom>
+          <a:noFill/>
+        </p:spPr>
+        <p:txBody>
+          <a:bodyPr wrap="square" anchor="ctr" lIns="0" rIns="0" tIns="0" bIns="0">
+            <a:spAutoFit/>
+          </a:bodyPr>
+          <a:lstStyle/>
+          <a:p>
+            <a:pPr algn="ctr"/>
+            <a:r>
+              <a:rPr sz="1300" b="1" i="0">
+                <a:solidFill>
+                  <a:srgbClr val="FFFDF8"/>
+                </a:solidFill>
+                <a:latin typeface="Segoe UI Semibold"/>
+              </a:rPr>
+              <a:t>4</a:t>
+            </a:r>
+          </a:p>
+        </p:txBody>
+      </p:sp>
+      <p:sp>
+        <p:nvSpPr>
+          <p:cNvPr id="17" name="TextBox 16"/>
+          <p:cNvSpPr txBox="1"/>
+          <p:nvPr/>
+        </p:nvSpPr>
+        <p:spPr>
+          <a:xfrm>
+            <a:off x="811700" y="3236662"/>
+            <a:ext cx="8020600" cy="496838"/>
+          </a:xfrm>
+          <a:prstGeom prst="rect">
+            <a:avLst/>
+          </a:prstGeom>
+          <a:noFill/>
+        </p:spPr>
+        <p:txBody>
+          <a:bodyPr wrap="square" anchor="ctr" lIns="0" rIns="0" tIns="0" bIns="0">
+            <a:spAutoFit/>
+          </a:bodyPr>
+          <a:lstStyle/>
+          <a:p>
+            <a:pPr algn="l">
+              <a:lnSpc>
+                <a:spcPct val="105000"/>
+              </a:lnSpc>
+            </a:pPr>
+            <a:r>
+              <a:rPr sz="1400" b="0" i="0">
+                <a:solidFill>
+                  <a:srgbClr val="181C23"/>
+                </a:solidFill>
+                <a:latin typeface="Segoe UI Semibold"/>
+              </a:rPr>
+              <a:t>Feedback: </a:t>
+            </a:r>
+            <a:r>
+              <a:rPr sz="1400" b="0" i="0">
+                <a:solidFill>
+                  <a:srgbClr val="6A707D"/>
+                </a:solidFill>
+                <a:latin typeface="Segoe UI"/>
+              </a:rPr>
+              <a:t>o que funcionou e o que mudar no módulo</a:t>
+            </a:r>
+          </a:p>
+        </p:txBody>
+      </p:sp>
+      <p:sp>
+        <p:nvSpPr>
+          <p:cNvPr id="18" name="Rounded Rectangle 17"/>
+          <p:cNvSpPr/>
+          <p:nvPr/>
+        </p:nvSpPr>
+        <p:spPr>
+          <a:xfrm>
+            <a:off x="311700" y="3883500"/>
+            <a:ext cx="8520600" cy="900000"/>
           </a:xfrm>
           <a:prstGeom prst="roundRect">
             <a:avLst>
-              <a:gd name="adj" fmla="val 8000"/>
+              <a:gd name="adj" fmla="val 6000"/>
             </a:avLst>
+          </a:prstGeom>
+          <a:solidFill>
+            <a:srgbClr val="DAF9DA"/>
+          </a:solidFill>
+          <a:ln>
+            <a:noFill/>
+          </a:ln>
+          <a:effectLst/>
+        </p:spPr>
+        <p:style>
+          <a:lnRef idx="1">
+            <a:schemeClr val="accent1"/>
+          </a:lnRef>
+          <a:fillRef idx="3">
+            <a:schemeClr val="accent1"/>
+          </a:fillRef>
+          <a:effectRef idx="2">
+            <a:schemeClr val="accent1"/>
+          </a:effectRef>
+          <a:fontRef idx="minor">
+            <a:schemeClr val="lt1"/>
+          </a:fontRef>
+        </p:style>
+        <p:txBody>
+          <a:bodyPr rtlCol="0" anchor="ctr"/>
+          <a:lstStyle/>
+          <a:p>
+            <a:pPr algn="ctr"/>
+          </a:p>
+        </p:txBody>
+      </p:sp>
+      <p:sp>
+        <p:nvSpPr>
+          <p:cNvPr id="19" name="Rounded Rectangle 18"/>
+          <p:cNvSpPr/>
+          <p:nvPr/>
+        </p:nvSpPr>
+        <p:spPr>
+          <a:xfrm>
+            <a:off x="311700" y="3883500"/>
+            <a:ext cx="70000" cy="900000"/>
+          </a:xfrm>
+          <a:prstGeom prst="roundRect">
+            <a:avLst>
+              <a:gd name="adj" fmla="val 50000"/>
+            </a:avLst>
+          </a:prstGeom>
+          <a:solidFill>
+            <a:srgbClr val="A6F750"/>
+          </a:solidFill>
+          <a:ln>
+            <a:noFill/>
+          </a:ln>
+          <a:effectLst/>
+        </p:spPr>
+        <p:style>
+          <a:lnRef idx="1">
+            <a:schemeClr val="accent1"/>
+          </a:lnRef>
+          <a:fillRef idx="3">
+            <a:schemeClr val="accent1"/>
+          </a:fillRef>
+          <a:effectRef idx="2">
+            <a:schemeClr val="accent1"/>
+          </a:effectRef>
+          <a:fontRef idx="minor">
+            <a:schemeClr val="lt1"/>
+          </a:fontRef>
+        </p:style>
+        <p:txBody>
+          <a:bodyPr rtlCol="0" anchor="ctr"/>
+          <a:lstStyle/>
+          <a:p>
+            <a:pPr algn="ctr"/>
+          </a:p>
+        </p:txBody>
+      </p:sp>
+      <p:sp>
+        <p:nvSpPr>
+          <p:cNvPr id="20" name="TextBox 19"/>
+          <p:cNvSpPr txBox="1"/>
+          <p:nvPr/>
+        </p:nvSpPr>
+        <p:spPr>
+          <a:xfrm>
+            <a:off x="511700" y="3973500"/>
+            <a:ext cx="8120600" cy="240000"/>
+          </a:xfrm>
+          <a:prstGeom prst="rect">
+            <a:avLst/>
+          </a:prstGeom>
+          <a:noFill/>
+        </p:spPr>
+        <p:txBody>
+          <a:bodyPr wrap="square" anchor="t" lIns="0" rIns="0" tIns="0" bIns="0">
+            <a:spAutoFit/>
+          </a:bodyPr>
+          <a:lstStyle/>
+          <a:p>
+            <a:pPr algn="l"/>
+            <a:r>
+              <a:rPr sz="1100" b="0" i="0">
+                <a:solidFill>
+                  <a:srgbClr val="2371FF"/>
+                </a:solidFill>
+                <a:latin typeface="Segoe UI Semibold"/>
+              </a:rPr>
+              <a:t>💡 ANALOGIA</a:t>
+            </a:r>
+          </a:p>
+        </p:txBody>
+      </p:sp>
+      <p:sp>
+        <p:nvSpPr>
+          <p:cNvPr id="21" name="TextBox 20"/>
+          <p:cNvSpPr txBox="1"/>
+          <p:nvPr/>
+        </p:nvSpPr>
+        <p:spPr>
+          <a:xfrm>
+            <a:off x="511700" y="4223500"/>
+            <a:ext cx="8120600" cy="500000"/>
+          </a:xfrm>
+          <a:prstGeom prst="rect">
+            <a:avLst/>
+          </a:prstGeom>
+          <a:noFill/>
+        </p:spPr>
+        <p:txBody>
+          <a:bodyPr wrap="square" anchor="t" lIns="0" rIns="0" tIns="0" bIns="0">
+            <a:spAutoFit/>
+          </a:bodyPr>
+          <a:lstStyle/>
+          <a:p>
+            <a:pPr algn="l">
+              <a:lnSpc>
+                <a:spcPct val="110000"/>
+              </a:lnSpc>
+            </a:pPr>
+            <a:r>
+              <a:rPr sz="1300" b="0" i="1">
+                <a:solidFill>
+                  <a:srgbClr val="181C23"/>
+                </a:solidFill>
+                <a:latin typeface="Segoe UI"/>
+              </a:rPr>
+              <a:t>A rubrica é o SBOM do seu aprendizado: lista o que você tem, em que versão, e onde ainda há 'CVE' para corrigir.</a:t>
+            </a:r>
+          </a:p>
+        </p:txBody>
+      </p:sp>
+      <p:sp>
+        <p:nvSpPr>
+          <p:cNvPr id="22" name="Rectangle 21"/>
+          <p:cNvSpPr/>
+          <p:nvPr/>
+        </p:nvSpPr>
+        <p:spPr>
+          <a:xfrm>
+            <a:off x="311700" y="4843500"/>
+            <a:ext cx="8520600" cy="6000"/>
+          </a:xfrm>
+          <a:prstGeom prst="rect">
+            <a:avLst/>
           </a:prstGeom>
           <a:solidFill>
             <a:srgbClr val="ECEDF3"/>
@@ -11714,1036 +13854,7 @@
       </p:sp>
       <p:sp>
         <p:nvSpPr>
-          <p:cNvPr id="7" name="Oval 6"/>
-          <p:cNvSpPr/>
-          <p:nvPr/>
-        </p:nvSpPr>
-        <p:spPr>
-          <a:xfrm>
-            <a:off x="461700" y="1787883"/>
-            <a:ext cx="280000" cy="280000"/>
-          </a:xfrm>
-          <a:prstGeom prst="ellipse">
-            <a:avLst/>
-          </a:prstGeom>
-          <a:solidFill>
-            <a:srgbClr val="2371FF"/>
-          </a:solidFill>
-          <a:ln>
-            <a:noFill/>
-          </a:ln>
-          <a:effectLst/>
-        </p:spPr>
-        <p:style>
-          <a:lnRef idx="1">
-            <a:schemeClr val="accent1"/>
-          </a:lnRef>
-          <a:fillRef idx="3">
-            <a:schemeClr val="accent1"/>
-          </a:fillRef>
-          <a:effectRef idx="2">
-            <a:schemeClr val="accent1"/>
-          </a:effectRef>
-          <a:fontRef idx="minor">
-            <a:schemeClr val="lt1"/>
-          </a:fontRef>
-        </p:style>
-        <p:txBody>
-          <a:bodyPr rtlCol="0" anchor="ctr"/>
-          <a:lstStyle/>
-          <a:p>
-            <a:pPr algn="ctr"/>
-          </a:p>
-        </p:txBody>
-      </p:sp>
-      <p:sp>
-        <p:nvSpPr>
-          <p:cNvPr id="8" name="TextBox 7"/>
-          <p:cNvSpPr txBox="1"/>
-          <p:nvPr/>
-        </p:nvSpPr>
-        <p:spPr>
-          <a:xfrm>
-            <a:off x="461700" y="1787883"/>
-            <a:ext cx="280000" cy="280000"/>
-          </a:xfrm>
-          <a:prstGeom prst="rect">
-            <a:avLst/>
-          </a:prstGeom>
-          <a:noFill/>
-        </p:spPr>
-        <p:txBody>
-          <a:bodyPr wrap="square" anchor="ctr" lIns="0" rIns="0" tIns="0" bIns="0">
-            <a:spAutoFit/>
-          </a:bodyPr>
-          <a:lstStyle/>
-          <a:p>
-            <a:pPr algn="ctr"/>
-            <a:r>
-              <a:rPr sz="1200" b="1" i="0">
-                <a:solidFill>
-                  <a:srgbClr val="FFFDF8"/>
-                </a:solidFill>
-                <a:latin typeface="Segoe UI Semibold"/>
-              </a:rPr>
-              <a:t>1</a:t>
-            </a:r>
-          </a:p>
-        </p:txBody>
-      </p:sp>
-      <p:sp>
-        <p:nvSpPr>
-          <p:cNvPr id="9" name="TextBox 8"/>
-          <p:cNvSpPr txBox="1"/>
-          <p:nvPr/>
-        </p:nvSpPr>
-        <p:spPr>
-          <a:xfrm>
-            <a:off x="901700" y="1746148"/>
-            <a:ext cx="7780600" cy="363470"/>
-          </a:xfrm>
-          <a:prstGeom prst="rect">
-            <a:avLst/>
-          </a:prstGeom>
-          <a:noFill/>
-        </p:spPr>
-        <p:txBody>
-          <a:bodyPr wrap="square" anchor="ctr" lIns="0" rIns="0" tIns="0" bIns="0">
-            <a:spAutoFit/>
-          </a:bodyPr>
-          <a:lstStyle/>
-          <a:p>
-            <a:pPr algn="l">
-              <a:lnSpc>
-                <a:spcPct val="100000"/>
-              </a:lnSpc>
-            </a:pPr>
-            <a:r>
-              <a:rPr sz="1300" b="0" i="0">
-                <a:solidFill>
-                  <a:srgbClr val="181C23"/>
-                </a:solidFill>
-                <a:latin typeface="Segoe UI Semibold"/>
-              </a:rPr>
-              <a:t>Contexto: </a:t>
-            </a:r>
-            <a:r>
-              <a:rPr sz="1300" b="0" i="0">
-                <a:solidFill>
-                  <a:srgbClr val="6A707D"/>
-                </a:solidFill>
-                <a:latin typeface="Segoe UI"/>
-              </a:rPr>
-              <a:t>aplicação e riscos — 2 min</a:t>
-            </a:r>
-          </a:p>
-        </p:txBody>
-      </p:sp>
-      <p:sp>
-        <p:nvSpPr>
-          <p:cNvPr id="10" name="Rounded Rectangle 9"/>
-          <p:cNvSpPr/>
-          <p:nvPr/>
-        </p:nvSpPr>
-        <p:spPr>
-          <a:xfrm>
-            <a:off x="311700" y="2199618"/>
-            <a:ext cx="8520600" cy="363470"/>
-          </a:xfrm>
-          <a:prstGeom prst="roundRect">
-            <a:avLst>
-              <a:gd name="adj" fmla="val 8000"/>
-            </a:avLst>
-          </a:prstGeom>
-          <a:solidFill>
-            <a:srgbClr val="ECEDF3"/>
-          </a:solidFill>
-          <a:ln>
-            <a:noFill/>
-          </a:ln>
-          <a:effectLst/>
-        </p:spPr>
-        <p:style>
-          <a:lnRef idx="1">
-            <a:schemeClr val="accent1"/>
-          </a:lnRef>
-          <a:fillRef idx="3">
-            <a:schemeClr val="accent1"/>
-          </a:fillRef>
-          <a:effectRef idx="2">
-            <a:schemeClr val="accent1"/>
-          </a:effectRef>
-          <a:fontRef idx="minor">
-            <a:schemeClr val="lt1"/>
-          </a:fontRef>
-        </p:style>
-        <p:txBody>
-          <a:bodyPr rtlCol="0" anchor="ctr"/>
-          <a:lstStyle/>
-          <a:p>
-            <a:pPr algn="ctr"/>
-          </a:p>
-        </p:txBody>
-      </p:sp>
-      <p:sp>
-        <p:nvSpPr>
-          <p:cNvPr id="11" name="Oval 10"/>
-          <p:cNvSpPr/>
-          <p:nvPr/>
-        </p:nvSpPr>
-        <p:spPr>
-          <a:xfrm>
-            <a:off x="461700" y="2241353"/>
-            <a:ext cx="280000" cy="280000"/>
-          </a:xfrm>
-          <a:prstGeom prst="ellipse">
-            <a:avLst/>
-          </a:prstGeom>
-          <a:solidFill>
-            <a:srgbClr val="2371FF"/>
-          </a:solidFill>
-          <a:ln>
-            <a:noFill/>
-          </a:ln>
-          <a:effectLst/>
-        </p:spPr>
-        <p:style>
-          <a:lnRef idx="1">
-            <a:schemeClr val="accent1"/>
-          </a:lnRef>
-          <a:fillRef idx="3">
-            <a:schemeClr val="accent1"/>
-          </a:fillRef>
-          <a:effectRef idx="2">
-            <a:schemeClr val="accent1"/>
-          </a:effectRef>
-          <a:fontRef idx="minor">
-            <a:schemeClr val="lt1"/>
-          </a:fontRef>
-        </p:style>
-        <p:txBody>
-          <a:bodyPr rtlCol="0" anchor="ctr"/>
-          <a:lstStyle/>
-          <a:p>
-            <a:pPr algn="ctr"/>
-          </a:p>
-        </p:txBody>
-      </p:sp>
-      <p:sp>
-        <p:nvSpPr>
-          <p:cNvPr id="12" name="TextBox 11"/>
-          <p:cNvSpPr txBox="1"/>
-          <p:nvPr/>
-        </p:nvSpPr>
-        <p:spPr>
-          <a:xfrm>
-            <a:off x="461700" y="2241353"/>
-            <a:ext cx="280000" cy="280000"/>
-          </a:xfrm>
-          <a:prstGeom prst="rect">
-            <a:avLst/>
-          </a:prstGeom>
-          <a:noFill/>
-        </p:spPr>
-        <p:txBody>
-          <a:bodyPr wrap="square" anchor="ctr" lIns="0" rIns="0" tIns="0" bIns="0">
-            <a:spAutoFit/>
-          </a:bodyPr>
-          <a:lstStyle/>
-          <a:p>
-            <a:pPr algn="ctr"/>
-            <a:r>
-              <a:rPr sz="1200" b="1" i="0">
-                <a:solidFill>
-                  <a:srgbClr val="FFFDF8"/>
-                </a:solidFill>
-                <a:latin typeface="Segoe UI Semibold"/>
-              </a:rPr>
-              <a:t>2</a:t>
-            </a:r>
-          </a:p>
-        </p:txBody>
-      </p:sp>
-      <p:sp>
-        <p:nvSpPr>
-          <p:cNvPr id="13" name="TextBox 12"/>
-          <p:cNvSpPr txBox="1"/>
-          <p:nvPr/>
-        </p:nvSpPr>
-        <p:spPr>
-          <a:xfrm>
-            <a:off x="901700" y="2199618"/>
-            <a:ext cx="7780600" cy="363470"/>
-          </a:xfrm>
-          <a:prstGeom prst="rect">
-            <a:avLst/>
-          </a:prstGeom>
-          <a:noFill/>
-        </p:spPr>
-        <p:txBody>
-          <a:bodyPr wrap="square" anchor="ctr" lIns="0" rIns="0" tIns="0" bIns="0">
-            <a:spAutoFit/>
-          </a:bodyPr>
-          <a:lstStyle/>
-          <a:p>
-            <a:pPr algn="l">
-              <a:lnSpc>
-                <a:spcPct val="100000"/>
-              </a:lnSpc>
-            </a:pPr>
-            <a:r>
-              <a:rPr sz="1300" b="0" i="0">
-                <a:solidFill>
-                  <a:srgbClr val="181C23"/>
-                </a:solidFill>
-                <a:latin typeface="Segoe UI Semibold"/>
-              </a:rPr>
-              <a:t>Demo: </a:t>
-            </a:r>
-            <a:r>
-              <a:rPr sz="1300" b="0" i="0">
-                <a:solidFill>
-                  <a:srgbClr val="6A707D"/>
-                </a:solidFill>
-                <a:latin typeface="Segoe UI"/>
-              </a:rPr>
-              <a:t>pipeline do commit ao deploy — 3 min</a:t>
-            </a:r>
-          </a:p>
-        </p:txBody>
-      </p:sp>
-      <p:sp>
-        <p:nvSpPr>
-          <p:cNvPr id="14" name="Rounded Rectangle 13"/>
-          <p:cNvSpPr/>
-          <p:nvPr/>
-        </p:nvSpPr>
-        <p:spPr>
-          <a:xfrm>
-            <a:off x="311700" y="2653088"/>
-            <a:ext cx="8520600" cy="363470"/>
-          </a:xfrm>
-          <a:prstGeom prst="roundRect">
-            <a:avLst>
-              <a:gd name="adj" fmla="val 8000"/>
-            </a:avLst>
-          </a:prstGeom>
-          <a:solidFill>
-            <a:srgbClr val="ECEDF3"/>
-          </a:solidFill>
-          <a:ln>
-            <a:noFill/>
-          </a:ln>
-          <a:effectLst/>
-        </p:spPr>
-        <p:style>
-          <a:lnRef idx="1">
-            <a:schemeClr val="accent1"/>
-          </a:lnRef>
-          <a:fillRef idx="3">
-            <a:schemeClr val="accent1"/>
-          </a:fillRef>
-          <a:effectRef idx="2">
-            <a:schemeClr val="accent1"/>
-          </a:effectRef>
-          <a:fontRef idx="minor">
-            <a:schemeClr val="lt1"/>
-          </a:fontRef>
-        </p:style>
-        <p:txBody>
-          <a:bodyPr rtlCol="0" anchor="ctr"/>
-          <a:lstStyle/>
-          <a:p>
-            <a:pPr algn="ctr"/>
-          </a:p>
-        </p:txBody>
-      </p:sp>
-      <p:sp>
-        <p:nvSpPr>
-          <p:cNvPr id="15" name="Oval 14"/>
-          <p:cNvSpPr/>
-          <p:nvPr/>
-        </p:nvSpPr>
-        <p:spPr>
-          <a:xfrm>
-            <a:off x="461700" y="2694823"/>
-            <a:ext cx="280000" cy="280000"/>
-          </a:xfrm>
-          <a:prstGeom prst="ellipse">
-            <a:avLst/>
-          </a:prstGeom>
-          <a:solidFill>
-            <a:srgbClr val="2371FF"/>
-          </a:solidFill>
-          <a:ln>
-            <a:noFill/>
-          </a:ln>
-          <a:effectLst/>
-        </p:spPr>
-        <p:style>
-          <a:lnRef idx="1">
-            <a:schemeClr val="accent1"/>
-          </a:lnRef>
-          <a:fillRef idx="3">
-            <a:schemeClr val="accent1"/>
-          </a:fillRef>
-          <a:effectRef idx="2">
-            <a:schemeClr val="accent1"/>
-          </a:effectRef>
-          <a:fontRef idx="minor">
-            <a:schemeClr val="lt1"/>
-          </a:fontRef>
-        </p:style>
-        <p:txBody>
-          <a:bodyPr rtlCol="0" anchor="ctr"/>
-          <a:lstStyle/>
-          <a:p>
-            <a:pPr algn="ctr"/>
-          </a:p>
-        </p:txBody>
-      </p:sp>
-      <p:sp>
-        <p:nvSpPr>
-          <p:cNvPr id="16" name="TextBox 15"/>
-          <p:cNvSpPr txBox="1"/>
-          <p:nvPr/>
-        </p:nvSpPr>
-        <p:spPr>
-          <a:xfrm>
-            <a:off x="461700" y="2694823"/>
-            <a:ext cx="280000" cy="280000"/>
-          </a:xfrm>
-          <a:prstGeom prst="rect">
-            <a:avLst/>
-          </a:prstGeom>
-          <a:noFill/>
-        </p:spPr>
-        <p:txBody>
-          <a:bodyPr wrap="square" anchor="ctr" lIns="0" rIns="0" tIns="0" bIns="0">
-            <a:spAutoFit/>
-          </a:bodyPr>
-          <a:lstStyle/>
-          <a:p>
-            <a:pPr algn="ctr"/>
-            <a:r>
-              <a:rPr sz="1200" b="1" i="0">
-                <a:solidFill>
-                  <a:srgbClr val="FFFDF8"/>
-                </a:solidFill>
-                <a:latin typeface="Segoe UI Semibold"/>
-              </a:rPr>
-              <a:t>3</a:t>
-            </a:r>
-          </a:p>
-        </p:txBody>
-      </p:sp>
-      <p:sp>
-        <p:nvSpPr>
-          <p:cNvPr id="17" name="TextBox 16"/>
-          <p:cNvSpPr txBox="1"/>
-          <p:nvPr/>
-        </p:nvSpPr>
-        <p:spPr>
-          <a:xfrm>
-            <a:off x="901700" y="2653088"/>
-            <a:ext cx="7780600" cy="363470"/>
-          </a:xfrm>
-          <a:prstGeom prst="rect">
-            <a:avLst/>
-          </a:prstGeom>
-          <a:noFill/>
-        </p:spPr>
-        <p:txBody>
-          <a:bodyPr wrap="square" anchor="ctr" lIns="0" rIns="0" tIns="0" bIns="0">
-            <a:spAutoFit/>
-          </a:bodyPr>
-          <a:lstStyle/>
-          <a:p>
-            <a:pPr algn="l">
-              <a:lnSpc>
-                <a:spcPct val="100000"/>
-              </a:lnSpc>
-            </a:pPr>
-            <a:r>
-              <a:rPr sz="1300" b="0" i="0">
-                <a:solidFill>
-                  <a:srgbClr val="181C23"/>
-                </a:solidFill>
-                <a:latin typeface="Segoe UI Semibold"/>
-              </a:rPr>
-              <a:t>Ataque: </a:t>
-            </a:r>
-            <a:r>
-              <a:rPr sz="1300" b="0" i="0">
-                <a:solidFill>
-                  <a:srgbClr val="6A707D"/>
-                </a:solidFill>
-                <a:latin typeface="Segoe UI"/>
-              </a:rPr>
-              <a:t>imagem não assinada bloqueada — 3 min</a:t>
-            </a:r>
-          </a:p>
-        </p:txBody>
-      </p:sp>
-      <p:sp>
-        <p:nvSpPr>
-          <p:cNvPr id="18" name="Rounded Rectangle 17"/>
-          <p:cNvSpPr/>
-          <p:nvPr/>
-        </p:nvSpPr>
-        <p:spPr>
-          <a:xfrm>
-            <a:off x="311700" y="3106558"/>
-            <a:ext cx="8520600" cy="363470"/>
-          </a:xfrm>
-          <a:prstGeom prst="roundRect">
-            <a:avLst>
-              <a:gd name="adj" fmla="val 8000"/>
-            </a:avLst>
-          </a:prstGeom>
-          <a:solidFill>
-            <a:srgbClr val="ECEDF3"/>
-          </a:solidFill>
-          <a:ln>
-            <a:noFill/>
-          </a:ln>
-          <a:effectLst/>
-        </p:spPr>
-        <p:style>
-          <a:lnRef idx="1">
-            <a:schemeClr val="accent1"/>
-          </a:lnRef>
-          <a:fillRef idx="3">
-            <a:schemeClr val="accent1"/>
-          </a:fillRef>
-          <a:effectRef idx="2">
-            <a:schemeClr val="accent1"/>
-          </a:effectRef>
-          <a:fontRef idx="minor">
-            <a:schemeClr val="lt1"/>
-          </a:fontRef>
-        </p:style>
-        <p:txBody>
-          <a:bodyPr rtlCol="0" anchor="ctr"/>
-          <a:lstStyle/>
-          <a:p>
-            <a:pPr algn="ctr"/>
-          </a:p>
-        </p:txBody>
-      </p:sp>
-      <p:sp>
-        <p:nvSpPr>
-          <p:cNvPr id="19" name="Oval 18"/>
-          <p:cNvSpPr/>
-          <p:nvPr/>
-        </p:nvSpPr>
-        <p:spPr>
-          <a:xfrm>
-            <a:off x="461700" y="3148293"/>
-            <a:ext cx="280000" cy="280000"/>
-          </a:xfrm>
-          <a:prstGeom prst="ellipse">
-            <a:avLst/>
-          </a:prstGeom>
-          <a:solidFill>
-            <a:srgbClr val="2371FF"/>
-          </a:solidFill>
-          <a:ln>
-            <a:noFill/>
-          </a:ln>
-          <a:effectLst/>
-        </p:spPr>
-        <p:style>
-          <a:lnRef idx="1">
-            <a:schemeClr val="accent1"/>
-          </a:lnRef>
-          <a:fillRef idx="3">
-            <a:schemeClr val="accent1"/>
-          </a:fillRef>
-          <a:effectRef idx="2">
-            <a:schemeClr val="accent1"/>
-          </a:effectRef>
-          <a:fontRef idx="minor">
-            <a:schemeClr val="lt1"/>
-          </a:fontRef>
-        </p:style>
-        <p:txBody>
-          <a:bodyPr rtlCol="0" anchor="ctr"/>
-          <a:lstStyle/>
-          <a:p>
-            <a:pPr algn="ctr"/>
-          </a:p>
-        </p:txBody>
-      </p:sp>
-      <p:sp>
-        <p:nvSpPr>
-          <p:cNvPr id="20" name="TextBox 19"/>
-          <p:cNvSpPr txBox="1"/>
-          <p:nvPr/>
-        </p:nvSpPr>
-        <p:spPr>
-          <a:xfrm>
-            <a:off x="461700" y="3148293"/>
-            <a:ext cx="280000" cy="280000"/>
-          </a:xfrm>
-          <a:prstGeom prst="rect">
-            <a:avLst/>
-          </a:prstGeom>
-          <a:noFill/>
-        </p:spPr>
-        <p:txBody>
-          <a:bodyPr wrap="square" anchor="ctr" lIns="0" rIns="0" tIns="0" bIns="0">
-            <a:spAutoFit/>
-          </a:bodyPr>
-          <a:lstStyle/>
-          <a:p>
-            <a:pPr algn="ctr"/>
-            <a:r>
-              <a:rPr sz="1200" b="1" i="0">
-                <a:solidFill>
-                  <a:srgbClr val="FFFDF8"/>
-                </a:solidFill>
-                <a:latin typeface="Segoe UI Semibold"/>
-              </a:rPr>
-              <a:t>4</a:t>
-            </a:r>
-          </a:p>
-        </p:txBody>
-      </p:sp>
-      <p:sp>
-        <p:nvSpPr>
-          <p:cNvPr id="21" name="TextBox 20"/>
-          <p:cNvSpPr txBox="1"/>
-          <p:nvPr/>
-        </p:nvSpPr>
-        <p:spPr>
-          <a:xfrm>
-            <a:off x="901700" y="3106558"/>
-            <a:ext cx="7780600" cy="363470"/>
-          </a:xfrm>
-          <a:prstGeom prst="rect">
-            <a:avLst/>
-          </a:prstGeom>
-          <a:noFill/>
-        </p:spPr>
-        <p:txBody>
-          <a:bodyPr wrap="square" anchor="ctr" lIns="0" rIns="0" tIns="0" bIns="0">
-            <a:spAutoFit/>
-          </a:bodyPr>
-          <a:lstStyle/>
-          <a:p>
-            <a:pPr algn="l">
-              <a:lnSpc>
-                <a:spcPct val="100000"/>
-              </a:lnSpc>
-            </a:pPr>
-            <a:r>
-              <a:rPr sz="1300" b="0" i="0">
-                <a:solidFill>
-                  <a:srgbClr val="181C23"/>
-                </a:solidFill>
-                <a:latin typeface="Segoe UI Semibold"/>
-              </a:rPr>
-              <a:t>Evidência + framework: </a:t>
-            </a:r>
-            <a:r>
-              <a:rPr sz="1300" b="0" i="0">
-                <a:solidFill>
-                  <a:srgbClr val="6A707D"/>
-                </a:solidFill>
-                <a:latin typeface="Segoe UI"/>
-              </a:rPr>
-              <a:t>pedidos pela banca — 5 min</a:t>
-            </a:r>
-          </a:p>
-        </p:txBody>
-      </p:sp>
-      <p:sp>
-        <p:nvSpPr>
-          <p:cNvPr id="22" name="Rounded Rectangle 21"/>
-          <p:cNvSpPr/>
-          <p:nvPr/>
-        </p:nvSpPr>
-        <p:spPr>
-          <a:xfrm>
-            <a:off x="311700" y="3560028"/>
-            <a:ext cx="8520600" cy="363470"/>
-          </a:xfrm>
-          <a:prstGeom prst="roundRect">
-            <a:avLst>
-              <a:gd name="adj" fmla="val 8000"/>
-            </a:avLst>
-          </a:prstGeom>
-          <a:solidFill>
-            <a:srgbClr val="ECEDF3"/>
-          </a:solidFill>
-          <a:ln>
-            <a:noFill/>
-          </a:ln>
-          <a:effectLst/>
-        </p:spPr>
-        <p:style>
-          <a:lnRef idx="1">
-            <a:schemeClr val="accent1"/>
-          </a:lnRef>
-          <a:fillRef idx="3">
-            <a:schemeClr val="accent1"/>
-          </a:fillRef>
-          <a:effectRef idx="2">
-            <a:schemeClr val="accent1"/>
-          </a:effectRef>
-          <a:fontRef idx="minor">
-            <a:schemeClr val="lt1"/>
-          </a:fontRef>
-        </p:style>
-        <p:txBody>
-          <a:bodyPr rtlCol="0" anchor="ctr"/>
-          <a:lstStyle/>
-          <a:p>
-            <a:pPr algn="ctr"/>
-          </a:p>
-        </p:txBody>
-      </p:sp>
-      <p:sp>
-        <p:nvSpPr>
-          <p:cNvPr id="23" name="Oval 22"/>
-          <p:cNvSpPr/>
-          <p:nvPr/>
-        </p:nvSpPr>
-        <p:spPr>
-          <a:xfrm>
-            <a:off x="461700" y="3601763"/>
-            <a:ext cx="280000" cy="280000"/>
-          </a:xfrm>
-          <a:prstGeom prst="ellipse">
-            <a:avLst/>
-          </a:prstGeom>
-          <a:solidFill>
-            <a:srgbClr val="2371FF"/>
-          </a:solidFill>
-          <a:ln>
-            <a:noFill/>
-          </a:ln>
-          <a:effectLst/>
-        </p:spPr>
-        <p:style>
-          <a:lnRef idx="1">
-            <a:schemeClr val="accent1"/>
-          </a:lnRef>
-          <a:fillRef idx="3">
-            <a:schemeClr val="accent1"/>
-          </a:fillRef>
-          <a:effectRef idx="2">
-            <a:schemeClr val="accent1"/>
-          </a:effectRef>
-          <a:fontRef idx="minor">
-            <a:schemeClr val="lt1"/>
-          </a:fontRef>
-        </p:style>
-        <p:txBody>
-          <a:bodyPr rtlCol="0" anchor="ctr"/>
-          <a:lstStyle/>
-          <a:p>
-            <a:pPr algn="ctr"/>
-          </a:p>
-        </p:txBody>
-      </p:sp>
-      <p:sp>
-        <p:nvSpPr>
-          <p:cNvPr id="24" name="TextBox 23"/>
-          <p:cNvSpPr txBox="1"/>
-          <p:nvPr/>
-        </p:nvSpPr>
-        <p:spPr>
-          <a:xfrm>
-            <a:off x="461700" y="3601763"/>
-            <a:ext cx="280000" cy="280000"/>
-          </a:xfrm>
-          <a:prstGeom prst="rect">
-            <a:avLst/>
-          </a:prstGeom>
-          <a:noFill/>
-        </p:spPr>
-        <p:txBody>
-          <a:bodyPr wrap="square" anchor="ctr" lIns="0" rIns="0" tIns="0" bIns="0">
-            <a:spAutoFit/>
-          </a:bodyPr>
-          <a:lstStyle/>
-          <a:p>
-            <a:pPr algn="ctr"/>
-            <a:r>
-              <a:rPr sz="1200" b="1" i="0">
-                <a:solidFill>
-                  <a:srgbClr val="FFFDF8"/>
-                </a:solidFill>
-                <a:latin typeface="Segoe UI Semibold"/>
-              </a:rPr>
-              <a:t>5</a:t>
-            </a:r>
-          </a:p>
-        </p:txBody>
-      </p:sp>
-      <p:sp>
-        <p:nvSpPr>
-          <p:cNvPr id="25" name="TextBox 24"/>
-          <p:cNvSpPr txBox="1"/>
-          <p:nvPr/>
-        </p:nvSpPr>
-        <p:spPr>
-          <a:xfrm>
-            <a:off x="901700" y="3560028"/>
-            <a:ext cx="7780600" cy="363470"/>
-          </a:xfrm>
-          <a:prstGeom prst="rect">
-            <a:avLst/>
-          </a:prstGeom>
-          <a:noFill/>
-        </p:spPr>
-        <p:txBody>
-          <a:bodyPr wrap="square" anchor="ctr" lIns="0" rIns="0" tIns="0" bIns="0">
-            <a:spAutoFit/>
-          </a:bodyPr>
-          <a:lstStyle/>
-          <a:p>
-            <a:pPr algn="l">
-              <a:lnSpc>
-                <a:spcPct val="100000"/>
-              </a:lnSpc>
-            </a:pPr>
-            <a:r>
-              <a:rPr sz="1300" b="0" i="0">
-                <a:solidFill>
-                  <a:srgbClr val="181C23"/>
-                </a:solidFill>
-                <a:latin typeface="Segoe UI Semibold"/>
-              </a:rPr>
-              <a:t>Perguntas: </a:t>
-            </a:r>
-            <a:r>
-              <a:rPr sz="1300" b="0" i="0">
-                <a:solidFill>
-                  <a:srgbClr val="6A707D"/>
-                </a:solidFill>
-                <a:latin typeface="Segoe UI"/>
-              </a:rPr>
-              <a:t>2 min</a:t>
-            </a:r>
-          </a:p>
-        </p:txBody>
-      </p:sp>
-      <p:sp>
-        <p:nvSpPr>
-          <p:cNvPr id="26" name="Rounded Rectangle 25"/>
-          <p:cNvSpPr/>
-          <p:nvPr/>
-        </p:nvSpPr>
-        <p:spPr>
-          <a:xfrm>
-            <a:off x="311700" y="4163500"/>
-            <a:ext cx="8520600" cy="620000"/>
-          </a:xfrm>
-          <a:prstGeom prst="roundRect">
-            <a:avLst>
-              <a:gd name="adj" fmla="val 6000"/>
-            </a:avLst>
-          </a:prstGeom>
-          <a:solidFill>
-            <a:srgbClr val="DAF9DA"/>
-          </a:solidFill>
-          <a:ln>
-            <a:noFill/>
-          </a:ln>
-          <a:effectLst/>
-        </p:spPr>
-        <p:style>
-          <a:lnRef idx="1">
-            <a:schemeClr val="accent1"/>
-          </a:lnRef>
-          <a:fillRef idx="3">
-            <a:schemeClr val="accent1"/>
-          </a:fillRef>
-          <a:effectRef idx="2">
-            <a:schemeClr val="accent1"/>
-          </a:effectRef>
-          <a:fontRef idx="minor">
-            <a:schemeClr val="lt1"/>
-          </a:fontRef>
-        </p:style>
-        <p:txBody>
-          <a:bodyPr rtlCol="0" anchor="ctr"/>
-          <a:lstStyle/>
-          <a:p>
-            <a:pPr algn="ctr"/>
-          </a:p>
-        </p:txBody>
-      </p:sp>
-      <p:sp>
-        <p:nvSpPr>
-          <p:cNvPr id="27" name="Rounded Rectangle 26"/>
-          <p:cNvSpPr/>
-          <p:nvPr/>
-        </p:nvSpPr>
-        <p:spPr>
-          <a:xfrm>
-            <a:off x="311700" y="4163500"/>
-            <a:ext cx="70000" cy="620000"/>
-          </a:xfrm>
-          <a:prstGeom prst="roundRect">
-            <a:avLst>
-              <a:gd name="adj" fmla="val 50000"/>
-            </a:avLst>
-          </a:prstGeom>
-          <a:solidFill>
-            <a:srgbClr val="A6F750"/>
-          </a:solidFill>
-          <a:ln>
-            <a:noFill/>
-          </a:ln>
-          <a:effectLst/>
-        </p:spPr>
-        <p:style>
-          <a:lnRef idx="1">
-            <a:schemeClr val="accent1"/>
-          </a:lnRef>
-          <a:fillRef idx="3">
-            <a:schemeClr val="accent1"/>
-          </a:fillRef>
-          <a:effectRef idx="2">
-            <a:schemeClr val="accent1"/>
-          </a:effectRef>
-          <a:fontRef idx="minor">
-            <a:schemeClr val="lt1"/>
-          </a:fontRef>
-        </p:style>
-        <p:txBody>
-          <a:bodyPr rtlCol="0" anchor="ctr"/>
-          <a:lstStyle/>
-          <a:p>
-            <a:pPr algn="ctr"/>
-          </a:p>
-        </p:txBody>
-      </p:sp>
-      <p:sp>
-        <p:nvSpPr>
-          <p:cNvPr id="28" name="TextBox 27"/>
-          <p:cNvSpPr txBox="1"/>
-          <p:nvPr/>
-        </p:nvSpPr>
-        <p:spPr>
-          <a:xfrm>
-            <a:off x="511700" y="4233500"/>
-            <a:ext cx="8120600" cy="220000"/>
-          </a:xfrm>
-          <a:prstGeom prst="rect">
-            <a:avLst/>
-          </a:prstGeom>
-          <a:noFill/>
-        </p:spPr>
-        <p:txBody>
-          <a:bodyPr wrap="square" anchor="t" lIns="0" rIns="0" tIns="0" bIns="0">
-            <a:spAutoFit/>
-          </a:bodyPr>
-          <a:lstStyle/>
-          <a:p>
-            <a:pPr algn="l"/>
-            <a:r>
-              <a:rPr sz="1100" b="0" i="0">
-                <a:solidFill>
-                  <a:srgbClr val="2371FF"/>
-                </a:solidFill>
-                <a:latin typeface="Segoe UI Semibold"/>
-              </a:rPr>
-              <a:t>✅ ENTREGÁVEL</a:t>
-            </a:r>
-          </a:p>
-        </p:txBody>
-      </p:sp>
-      <p:sp>
-        <p:nvSpPr>
-          <p:cNvPr id="29" name="TextBox 28"/>
-          <p:cNvSpPr txBox="1"/>
-          <p:nvPr/>
-        </p:nvSpPr>
-        <p:spPr>
-          <a:xfrm>
-            <a:off x="511700" y="4453500"/>
-            <a:ext cx="8120600" cy="300000"/>
-          </a:xfrm>
-          <a:prstGeom prst="rect">
-            <a:avLst/>
-          </a:prstGeom>
-          <a:noFill/>
-        </p:spPr>
-        <p:txBody>
-          <a:bodyPr wrap="square" anchor="t" lIns="0" rIns="0" tIns="0" bIns="0">
-            <a:spAutoFit/>
-          </a:bodyPr>
-          <a:lstStyle/>
-          <a:p>
-            <a:pPr algn="l">
-              <a:lnSpc>
-                <a:spcPct val="105000"/>
-              </a:lnSpc>
-            </a:pPr>
-            <a:r>
-              <a:rPr sz="1200" b="0" i="1">
-                <a:solidFill>
-                  <a:srgbClr val="181C23"/>
-                </a:solidFill>
-                <a:latin typeface="Segoe UI"/>
-              </a:rPr>
-              <a:t>Repositório, README com mapeamento de frameworks, evidências e apresentação. Rubrica: 0–100 pontos.</a:t>
-            </a:r>
-          </a:p>
-        </p:txBody>
-      </p:sp>
-      <p:sp>
-        <p:nvSpPr>
-          <p:cNvPr id="30" name="Rectangle 29"/>
-          <p:cNvSpPr/>
-          <p:nvPr/>
-        </p:nvSpPr>
-        <p:spPr>
-          <a:xfrm>
-            <a:off x="311700" y="4843500"/>
-            <a:ext cx="8520600" cy="6000"/>
-          </a:xfrm>
-          <a:prstGeom prst="rect">
-            <a:avLst/>
-          </a:prstGeom>
-          <a:solidFill>
-            <a:srgbClr val="ECEDF3"/>
-          </a:solidFill>
-          <a:ln>
-            <a:noFill/>
-          </a:ln>
-          <a:effectLst/>
-        </p:spPr>
-        <p:style>
-          <a:lnRef idx="1">
-            <a:schemeClr val="accent1"/>
-          </a:lnRef>
-          <a:fillRef idx="3">
-            <a:schemeClr val="accent1"/>
-          </a:fillRef>
-          <a:effectRef idx="2">
-            <a:schemeClr val="accent1"/>
-          </a:effectRef>
-          <a:fontRef idx="minor">
-            <a:schemeClr val="lt1"/>
-          </a:fontRef>
-        </p:style>
-        <p:txBody>
-          <a:bodyPr rtlCol="0" anchor="ctr"/>
-          <a:lstStyle/>
-          <a:p>
-            <a:pPr algn="ctr"/>
-          </a:p>
-        </p:txBody>
-      </p:sp>
-      <p:sp>
-        <p:nvSpPr>
-          <p:cNvPr id="31" name="TextBox 30"/>
+          <p:cNvPr id="23" name="TextBox 22"/>
           <p:cNvSpPr txBox="1"/>
           <p:nvPr/>
         </p:nvSpPr>
@@ -12778,7 +13889,7 @@
       </p:sp>
       <p:sp>
         <p:nvSpPr>
-          <p:cNvPr id="32" name="TextBox 31"/>
+          <p:cNvPr id="24" name="TextBox 23"/>
           <p:cNvSpPr txBox="1"/>
           <p:nvPr/>
         </p:nvSpPr>
@@ -12806,7 +13917,7 @@
                 </a:solidFill>
                 <a:latin typeface="Segoe UI Semibold"/>
               </a:rPr>
-              <a:t>8</a:t>
+              <a:t>7</a:t>
             </a:r>
           </a:p>
         </p:txBody>
@@ -12883,7 +13994,7 @@
                 </a:solidFill>
                 <a:latin typeface="Segoe UI Semibold"/>
               </a:rPr>
-              <a:t>RESUMO</a:t>
+              <a:t>BANCA</a:t>
             </a:r>
           </a:p>
         </p:txBody>
@@ -12918,7 +14029,7 @@
                 </a:solidFill>
                 <a:latin typeface="Segoe UI Semibold"/>
               </a:rPr>
-              <a:t>Recapitulando a Aula</a:t>
+              <a:t>Apresentações do projeto final</a:t>
             </a:r>
           </a:p>
         </p:txBody>
@@ -12976,7 +14087,7 @@
         <p:spPr>
           <a:xfrm>
             <a:off x="311700" y="1746148"/>
-            <a:ext cx="8520600" cy="570000"/>
+            <a:ext cx="8520600" cy="363470"/>
           </a:xfrm>
           <a:prstGeom prst="roundRect">
             <a:avLst>
@@ -13015,14 +14126,879 @@
       </p:sp>
       <p:sp>
         <p:nvSpPr>
-          <p:cNvPr id="7" name="Rounded Rectangle 6"/>
+          <p:cNvPr id="7" name="Oval 6"/>
           <p:cNvSpPr/>
           <p:nvPr/>
         </p:nvSpPr>
         <p:spPr>
           <a:xfrm>
-            <a:off x="311700" y="1746148"/>
-            <a:ext cx="70000" cy="570000"/>
+            <a:off x="461700" y="1787883"/>
+            <a:ext cx="280000" cy="280000"/>
+          </a:xfrm>
+          <a:prstGeom prst="ellipse">
+            <a:avLst/>
+          </a:prstGeom>
+          <a:solidFill>
+            <a:srgbClr val="2371FF"/>
+          </a:solidFill>
+          <a:ln>
+            <a:noFill/>
+          </a:ln>
+          <a:effectLst/>
+        </p:spPr>
+        <p:style>
+          <a:lnRef idx="1">
+            <a:schemeClr val="accent1"/>
+          </a:lnRef>
+          <a:fillRef idx="3">
+            <a:schemeClr val="accent1"/>
+          </a:fillRef>
+          <a:effectRef idx="2">
+            <a:schemeClr val="accent1"/>
+          </a:effectRef>
+          <a:fontRef idx="minor">
+            <a:schemeClr val="lt1"/>
+          </a:fontRef>
+        </p:style>
+        <p:txBody>
+          <a:bodyPr rtlCol="0" anchor="ctr"/>
+          <a:lstStyle/>
+          <a:p>
+            <a:pPr algn="ctr"/>
+          </a:p>
+        </p:txBody>
+      </p:sp>
+      <p:sp>
+        <p:nvSpPr>
+          <p:cNvPr id="8" name="TextBox 7"/>
+          <p:cNvSpPr txBox="1"/>
+          <p:nvPr/>
+        </p:nvSpPr>
+        <p:spPr>
+          <a:xfrm>
+            <a:off x="461700" y="1787883"/>
+            <a:ext cx="280000" cy="280000"/>
+          </a:xfrm>
+          <a:prstGeom prst="rect">
+            <a:avLst/>
+          </a:prstGeom>
+          <a:noFill/>
+        </p:spPr>
+        <p:txBody>
+          <a:bodyPr wrap="square" anchor="ctr" lIns="0" rIns="0" tIns="0" bIns="0">
+            <a:spAutoFit/>
+          </a:bodyPr>
+          <a:lstStyle/>
+          <a:p>
+            <a:pPr algn="ctr"/>
+            <a:r>
+              <a:rPr sz="1200" b="1" i="0">
+                <a:solidFill>
+                  <a:srgbClr val="FFFDF8"/>
+                </a:solidFill>
+                <a:latin typeface="Segoe UI Semibold"/>
+              </a:rPr>
+              <a:t>1</a:t>
+            </a:r>
+          </a:p>
+        </p:txBody>
+      </p:sp>
+      <p:sp>
+        <p:nvSpPr>
+          <p:cNvPr id="9" name="TextBox 8"/>
+          <p:cNvSpPr txBox="1"/>
+          <p:nvPr/>
+        </p:nvSpPr>
+        <p:spPr>
+          <a:xfrm>
+            <a:off x="901700" y="1746148"/>
+            <a:ext cx="7780600" cy="363470"/>
+          </a:xfrm>
+          <a:prstGeom prst="rect">
+            <a:avLst/>
+          </a:prstGeom>
+          <a:noFill/>
+        </p:spPr>
+        <p:txBody>
+          <a:bodyPr wrap="square" anchor="ctr" lIns="0" rIns="0" tIns="0" bIns="0">
+            <a:spAutoFit/>
+          </a:bodyPr>
+          <a:lstStyle/>
+          <a:p>
+            <a:pPr algn="l">
+              <a:lnSpc>
+                <a:spcPct val="100000"/>
+              </a:lnSpc>
+            </a:pPr>
+            <a:r>
+              <a:rPr sz="1300" b="0" i="0">
+                <a:solidFill>
+                  <a:srgbClr val="181C23"/>
+                </a:solidFill>
+                <a:latin typeface="Segoe UI Semibold"/>
+              </a:rPr>
+              <a:t>Contexto: </a:t>
+            </a:r>
+            <a:r>
+              <a:rPr sz="1300" b="0" i="0">
+                <a:solidFill>
+                  <a:srgbClr val="6A707D"/>
+                </a:solidFill>
+                <a:latin typeface="Segoe UI"/>
+              </a:rPr>
+              <a:t>aplicação e riscos — 2 min</a:t>
+            </a:r>
+          </a:p>
+        </p:txBody>
+      </p:sp>
+      <p:sp>
+        <p:nvSpPr>
+          <p:cNvPr id="10" name="Rounded Rectangle 9"/>
+          <p:cNvSpPr/>
+          <p:nvPr/>
+        </p:nvSpPr>
+        <p:spPr>
+          <a:xfrm>
+            <a:off x="311700" y="2199618"/>
+            <a:ext cx="8520600" cy="363470"/>
+          </a:xfrm>
+          <a:prstGeom prst="roundRect">
+            <a:avLst>
+              <a:gd name="adj" fmla="val 8000"/>
+            </a:avLst>
+          </a:prstGeom>
+          <a:solidFill>
+            <a:srgbClr val="ECEDF3"/>
+          </a:solidFill>
+          <a:ln>
+            <a:noFill/>
+          </a:ln>
+          <a:effectLst/>
+        </p:spPr>
+        <p:style>
+          <a:lnRef idx="1">
+            <a:schemeClr val="accent1"/>
+          </a:lnRef>
+          <a:fillRef idx="3">
+            <a:schemeClr val="accent1"/>
+          </a:fillRef>
+          <a:effectRef idx="2">
+            <a:schemeClr val="accent1"/>
+          </a:effectRef>
+          <a:fontRef idx="minor">
+            <a:schemeClr val="lt1"/>
+          </a:fontRef>
+        </p:style>
+        <p:txBody>
+          <a:bodyPr rtlCol="0" anchor="ctr"/>
+          <a:lstStyle/>
+          <a:p>
+            <a:pPr algn="ctr"/>
+          </a:p>
+        </p:txBody>
+      </p:sp>
+      <p:sp>
+        <p:nvSpPr>
+          <p:cNvPr id="11" name="Oval 10"/>
+          <p:cNvSpPr/>
+          <p:nvPr/>
+        </p:nvSpPr>
+        <p:spPr>
+          <a:xfrm>
+            <a:off x="461700" y="2241353"/>
+            <a:ext cx="280000" cy="280000"/>
+          </a:xfrm>
+          <a:prstGeom prst="ellipse">
+            <a:avLst/>
+          </a:prstGeom>
+          <a:solidFill>
+            <a:srgbClr val="2371FF"/>
+          </a:solidFill>
+          <a:ln>
+            <a:noFill/>
+          </a:ln>
+          <a:effectLst/>
+        </p:spPr>
+        <p:style>
+          <a:lnRef idx="1">
+            <a:schemeClr val="accent1"/>
+          </a:lnRef>
+          <a:fillRef idx="3">
+            <a:schemeClr val="accent1"/>
+          </a:fillRef>
+          <a:effectRef idx="2">
+            <a:schemeClr val="accent1"/>
+          </a:effectRef>
+          <a:fontRef idx="minor">
+            <a:schemeClr val="lt1"/>
+          </a:fontRef>
+        </p:style>
+        <p:txBody>
+          <a:bodyPr rtlCol="0" anchor="ctr"/>
+          <a:lstStyle/>
+          <a:p>
+            <a:pPr algn="ctr"/>
+          </a:p>
+        </p:txBody>
+      </p:sp>
+      <p:sp>
+        <p:nvSpPr>
+          <p:cNvPr id="12" name="TextBox 11"/>
+          <p:cNvSpPr txBox="1"/>
+          <p:nvPr/>
+        </p:nvSpPr>
+        <p:spPr>
+          <a:xfrm>
+            <a:off x="461700" y="2241353"/>
+            <a:ext cx="280000" cy="280000"/>
+          </a:xfrm>
+          <a:prstGeom prst="rect">
+            <a:avLst/>
+          </a:prstGeom>
+          <a:noFill/>
+        </p:spPr>
+        <p:txBody>
+          <a:bodyPr wrap="square" anchor="ctr" lIns="0" rIns="0" tIns="0" bIns="0">
+            <a:spAutoFit/>
+          </a:bodyPr>
+          <a:lstStyle/>
+          <a:p>
+            <a:pPr algn="ctr"/>
+            <a:r>
+              <a:rPr sz="1200" b="1" i="0">
+                <a:solidFill>
+                  <a:srgbClr val="FFFDF8"/>
+                </a:solidFill>
+                <a:latin typeface="Segoe UI Semibold"/>
+              </a:rPr>
+              <a:t>2</a:t>
+            </a:r>
+          </a:p>
+        </p:txBody>
+      </p:sp>
+      <p:sp>
+        <p:nvSpPr>
+          <p:cNvPr id="13" name="TextBox 12"/>
+          <p:cNvSpPr txBox="1"/>
+          <p:nvPr/>
+        </p:nvSpPr>
+        <p:spPr>
+          <a:xfrm>
+            <a:off x="901700" y="2199618"/>
+            <a:ext cx="7780600" cy="363470"/>
+          </a:xfrm>
+          <a:prstGeom prst="rect">
+            <a:avLst/>
+          </a:prstGeom>
+          <a:noFill/>
+        </p:spPr>
+        <p:txBody>
+          <a:bodyPr wrap="square" anchor="ctr" lIns="0" rIns="0" tIns="0" bIns="0">
+            <a:spAutoFit/>
+          </a:bodyPr>
+          <a:lstStyle/>
+          <a:p>
+            <a:pPr algn="l">
+              <a:lnSpc>
+                <a:spcPct val="100000"/>
+              </a:lnSpc>
+            </a:pPr>
+            <a:r>
+              <a:rPr sz="1300" b="0" i="0">
+                <a:solidFill>
+                  <a:srgbClr val="181C23"/>
+                </a:solidFill>
+                <a:latin typeface="Segoe UI Semibold"/>
+              </a:rPr>
+              <a:t>Demo: </a:t>
+            </a:r>
+            <a:r>
+              <a:rPr sz="1300" b="0" i="0">
+                <a:solidFill>
+                  <a:srgbClr val="6A707D"/>
+                </a:solidFill>
+                <a:latin typeface="Segoe UI"/>
+              </a:rPr>
+              <a:t>pipeline do commit ao deploy — 3 min</a:t>
+            </a:r>
+          </a:p>
+        </p:txBody>
+      </p:sp>
+      <p:sp>
+        <p:nvSpPr>
+          <p:cNvPr id="14" name="Rounded Rectangle 13"/>
+          <p:cNvSpPr/>
+          <p:nvPr/>
+        </p:nvSpPr>
+        <p:spPr>
+          <a:xfrm>
+            <a:off x="311700" y="2653088"/>
+            <a:ext cx="8520600" cy="363470"/>
+          </a:xfrm>
+          <a:prstGeom prst="roundRect">
+            <a:avLst>
+              <a:gd name="adj" fmla="val 8000"/>
+            </a:avLst>
+          </a:prstGeom>
+          <a:solidFill>
+            <a:srgbClr val="ECEDF3"/>
+          </a:solidFill>
+          <a:ln>
+            <a:noFill/>
+          </a:ln>
+          <a:effectLst/>
+        </p:spPr>
+        <p:style>
+          <a:lnRef idx="1">
+            <a:schemeClr val="accent1"/>
+          </a:lnRef>
+          <a:fillRef idx="3">
+            <a:schemeClr val="accent1"/>
+          </a:fillRef>
+          <a:effectRef idx="2">
+            <a:schemeClr val="accent1"/>
+          </a:effectRef>
+          <a:fontRef idx="minor">
+            <a:schemeClr val="lt1"/>
+          </a:fontRef>
+        </p:style>
+        <p:txBody>
+          <a:bodyPr rtlCol="0" anchor="ctr"/>
+          <a:lstStyle/>
+          <a:p>
+            <a:pPr algn="ctr"/>
+          </a:p>
+        </p:txBody>
+      </p:sp>
+      <p:sp>
+        <p:nvSpPr>
+          <p:cNvPr id="15" name="Oval 14"/>
+          <p:cNvSpPr/>
+          <p:nvPr/>
+        </p:nvSpPr>
+        <p:spPr>
+          <a:xfrm>
+            <a:off x="461700" y="2694823"/>
+            <a:ext cx="280000" cy="280000"/>
+          </a:xfrm>
+          <a:prstGeom prst="ellipse">
+            <a:avLst/>
+          </a:prstGeom>
+          <a:solidFill>
+            <a:srgbClr val="2371FF"/>
+          </a:solidFill>
+          <a:ln>
+            <a:noFill/>
+          </a:ln>
+          <a:effectLst/>
+        </p:spPr>
+        <p:style>
+          <a:lnRef idx="1">
+            <a:schemeClr val="accent1"/>
+          </a:lnRef>
+          <a:fillRef idx="3">
+            <a:schemeClr val="accent1"/>
+          </a:fillRef>
+          <a:effectRef idx="2">
+            <a:schemeClr val="accent1"/>
+          </a:effectRef>
+          <a:fontRef idx="minor">
+            <a:schemeClr val="lt1"/>
+          </a:fontRef>
+        </p:style>
+        <p:txBody>
+          <a:bodyPr rtlCol="0" anchor="ctr"/>
+          <a:lstStyle/>
+          <a:p>
+            <a:pPr algn="ctr"/>
+          </a:p>
+        </p:txBody>
+      </p:sp>
+      <p:sp>
+        <p:nvSpPr>
+          <p:cNvPr id="16" name="TextBox 15"/>
+          <p:cNvSpPr txBox="1"/>
+          <p:nvPr/>
+        </p:nvSpPr>
+        <p:spPr>
+          <a:xfrm>
+            <a:off x="461700" y="2694823"/>
+            <a:ext cx="280000" cy="280000"/>
+          </a:xfrm>
+          <a:prstGeom prst="rect">
+            <a:avLst/>
+          </a:prstGeom>
+          <a:noFill/>
+        </p:spPr>
+        <p:txBody>
+          <a:bodyPr wrap="square" anchor="ctr" lIns="0" rIns="0" tIns="0" bIns="0">
+            <a:spAutoFit/>
+          </a:bodyPr>
+          <a:lstStyle/>
+          <a:p>
+            <a:pPr algn="ctr"/>
+            <a:r>
+              <a:rPr sz="1200" b="1" i="0">
+                <a:solidFill>
+                  <a:srgbClr val="FFFDF8"/>
+                </a:solidFill>
+                <a:latin typeface="Segoe UI Semibold"/>
+              </a:rPr>
+              <a:t>3</a:t>
+            </a:r>
+          </a:p>
+        </p:txBody>
+      </p:sp>
+      <p:sp>
+        <p:nvSpPr>
+          <p:cNvPr id="17" name="TextBox 16"/>
+          <p:cNvSpPr txBox="1"/>
+          <p:nvPr/>
+        </p:nvSpPr>
+        <p:spPr>
+          <a:xfrm>
+            <a:off x="901700" y="2653088"/>
+            <a:ext cx="7780600" cy="363470"/>
+          </a:xfrm>
+          <a:prstGeom prst="rect">
+            <a:avLst/>
+          </a:prstGeom>
+          <a:noFill/>
+        </p:spPr>
+        <p:txBody>
+          <a:bodyPr wrap="square" anchor="ctr" lIns="0" rIns="0" tIns="0" bIns="0">
+            <a:spAutoFit/>
+          </a:bodyPr>
+          <a:lstStyle/>
+          <a:p>
+            <a:pPr algn="l">
+              <a:lnSpc>
+                <a:spcPct val="100000"/>
+              </a:lnSpc>
+            </a:pPr>
+            <a:r>
+              <a:rPr sz="1300" b="0" i="0">
+                <a:solidFill>
+                  <a:srgbClr val="181C23"/>
+                </a:solidFill>
+                <a:latin typeface="Segoe UI Semibold"/>
+              </a:rPr>
+              <a:t>Ataque: </a:t>
+            </a:r>
+            <a:r>
+              <a:rPr sz="1300" b="0" i="0">
+                <a:solidFill>
+                  <a:srgbClr val="6A707D"/>
+                </a:solidFill>
+                <a:latin typeface="Segoe UI"/>
+              </a:rPr>
+              <a:t>imagem não assinada bloqueada — 3 min</a:t>
+            </a:r>
+          </a:p>
+        </p:txBody>
+      </p:sp>
+      <p:sp>
+        <p:nvSpPr>
+          <p:cNvPr id="18" name="Rounded Rectangle 17"/>
+          <p:cNvSpPr/>
+          <p:nvPr/>
+        </p:nvSpPr>
+        <p:spPr>
+          <a:xfrm>
+            <a:off x="311700" y="3106558"/>
+            <a:ext cx="8520600" cy="363470"/>
+          </a:xfrm>
+          <a:prstGeom prst="roundRect">
+            <a:avLst>
+              <a:gd name="adj" fmla="val 8000"/>
+            </a:avLst>
+          </a:prstGeom>
+          <a:solidFill>
+            <a:srgbClr val="ECEDF3"/>
+          </a:solidFill>
+          <a:ln>
+            <a:noFill/>
+          </a:ln>
+          <a:effectLst/>
+        </p:spPr>
+        <p:style>
+          <a:lnRef idx="1">
+            <a:schemeClr val="accent1"/>
+          </a:lnRef>
+          <a:fillRef idx="3">
+            <a:schemeClr val="accent1"/>
+          </a:fillRef>
+          <a:effectRef idx="2">
+            <a:schemeClr val="accent1"/>
+          </a:effectRef>
+          <a:fontRef idx="minor">
+            <a:schemeClr val="lt1"/>
+          </a:fontRef>
+        </p:style>
+        <p:txBody>
+          <a:bodyPr rtlCol="0" anchor="ctr"/>
+          <a:lstStyle/>
+          <a:p>
+            <a:pPr algn="ctr"/>
+          </a:p>
+        </p:txBody>
+      </p:sp>
+      <p:sp>
+        <p:nvSpPr>
+          <p:cNvPr id="19" name="Oval 18"/>
+          <p:cNvSpPr/>
+          <p:nvPr/>
+        </p:nvSpPr>
+        <p:spPr>
+          <a:xfrm>
+            <a:off x="461700" y="3148293"/>
+            <a:ext cx="280000" cy="280000"/>
+          </a:xfrm>
+          <a:prstGeom prst="ellipse">
+            <a:avLst/>
+          </a:prstGeom>
+          <a:solidFill>
+            <a:srgbClr val="2371FF"/>
+          </a:solidFill>
+          <a:ln>
+            <a:noFill/>
+          </a:ln>
+          <a:effectLst/>
+        </p:spPr>
+        <p:style>
+          <a:lnRef idx="1">
+            <a:schemeClr val="accent1"/>
+          </a:lnRef>
+          <a:fillRef idx="3">
+            <a:schemeClr val="accent1"/>
+          </a:fillRef>
+          <a:effectRef idx="2">
+            <a:schemeClr val="accent1"/>
+          </a:effectRef>
+          <a:fontRef idx="minor">
+            <a:schemeClr val="lt1"/>
+          </a:fontRef>
+        </p:style>
+        <p:txBody>
+          <a:bodyPr rtlCol="0" anchor="ctr"/>
+          <a:lstStyle/>
+          <a:p>
+            <a:pPr algn="ctr"/>
+          </a:p>
+        </p:txBody>
+      </p:sp>
+      <p:sp>
+        <p:nvSpPr>
+          <p:cNvPr id="20" name="TextBox 19"/>
+          <p:cNvSpPr txBox="1"/>
+          <p:nvPr/>
+        </p:nvSpPr>
+        <p:spPr>
+          <a:xfrm>
+            <a:off x="461700" y="3148293"/>
+            <a:ext cx="280000" cy="280000"/>
+          </a:xfrm>
+          <a:prstGeom prst="rect">
+            <a:avLst/>
+          </a:prstGeom>
+          <a:noFill/>
+        </p:spPr>
+        <p:txBody>
+          <a:bodyPr wrap="square" anchor="ctr" lIns="0" rIns="0" tIns="0" bIns="0">
+            <a:spAutoFit/>
+          </a:bodyPr>
+          <a:lstStyle/>
+          <a:p>
+            <a:pPr algn="ctr"/>
+            <a:r>
+              <a:rPr sz="1200" b="1" i="0">
+                <a:solidFill>
+                  <a:srgbClr val="FFFDF8"/>
+                </a:solidFill>
+                <a:latin typeface="Segoe UI Semibold"/>
+              </a:rPr>
+              <a:t>4</a:t>
+            </a:r>
+          </a:p>
+        </p:txBody>
+      </p:sp>
+      <p:sp>
+        <p:nvSpPr>
+          <p:cNvPr id="21" name="TextBox 20"/>
+          <p:cNvSpPr txBox="1"/>
+          <p:nvPr/>
+        </p:nvSpPr>
+        <p:spPr>
+          <a:xfrm>
+            <a:off x="901700" y="3106558"/>
+            <a:ext cx="7780600" cy="363470"/>
+          </a:xfrm>
+          <a:prstGeom prst="rect">
+            <a:avLst/>
+          </a:prstGeom>
+          <a:noFill/>
+        </p:spPr>
+        <p:txBody>
+          <a:bodyPr wrap="square" anchor="ctr" lIns="0" rIns="0" tIns="0" bIns="0">
+            <a:spAutoFit/>
+          </a:bodyPr>
+          <a:lstStyle/>
+          <a:p>
+            <a:pPr algn="l">
+              <a:lnSpc>
+                <a:spcPct val="100000"/>
+              </a:lnSpc>
+            </a:pPr>
+            <a:r>
+              <a:rPr sz="1300" b="0" i="0">
+                <a:solidFill>
+                  <a:srgbClr val="181C23"/>
+                </a:solidFill>
+                <a:latin typeface="Segoe UI Semibold"/>
+              </a:rPr>
+              <a:t>Evidência + framework: </a:t>
+            </a:r>
+            <a:r>
+              <a:rPr sz="1300" b="0" i="0">
+                <a:solidFill>
+                  <a:srgbClr val="6A707D"/>
+                </a:solidFill>
+                <a:latin typeface="Segoe UI"/>
+              </a:rPr>
+              <a:t>pedidos pela banca — 5 min</a:t>
+            </a:r>
+          </a:p>
+        </p:txBody>
+      </p:sp>
+      <p:sp>
+        <p:nvSpPr>
+          <p:cNvPr id="22" name="Rounded Rectangle 21"/>
+          <p:cNvSpPr/>
+          <p:nvPr/>
+        </p:nvSpPr>
+        <p:spPr>
+          <a:xfrm>
+            <a:off x="311700" y="3560028"/>
+            <a:ext cx="8520600" cy="363470"/>
+          </a:xfrm>
+          <a:prstGeom prst="roundRect">
+            <a:avLst>
+              <a:gd name="adj" fmla="val 8000"/>
+            </a:avLst>
+          </a:prstGeom>
+          <a:solidFill>
+            <a:srgbClr val="ECEDF3"/>
+          </a:solidFill>
+          <a:ln>
+            <a:noFill/>
+          </a:ln>
+          <a:effectLst/>
+        </p:spPr>
+        <p:style>
+          <a:lnRef idx="1">
+            <a:schemeClr val="accent1"/>
+          </a:lnRef>
+          <a:fillRef idx="3">
+            <a:schemeClr val="accent1"/>
+          </a:fillRef>
+          <a:effectRef idx="2">
+            <a:schemeClr val="accent1"/>
+          </a:effectRef>
+          <a:fontRef idx="minor">
+            <a:schemeClr val="lt1"/>
+          </a:fontRef>
+        </p:style>
+        <p:txBody>
+          <a:bodyPr rtlCol="0" anchor="ctr"/>
+          <a:lstStyle/>
+          <a:p>
+            <a:pPr algn="ctr"/>
+          </a:p>
+        </p:txBody>
+      </p:sp>
+      <p:sp>
+        <p:nvSpPr>
+          <p:cNvPr id="23" name="Oval 22"/>
+          <p:cNvSpPr/>
+          <p:nvPr/>
+        </p:nvSpPr>
+        <p:spPr>
+          <a:xfrm>
+            <a:off x="461700" y="3601763"/>
+            <a:ext cx="280000" cy="280000"/>
+          </a:xfrm>
+          <a:prstGeom prst="ellipse">
+            <a:avLst/>
+          </a:prstGeom>
+          <a:solidFill>
+            <a:srgbClr val="2371FF"/>
+          </a:solidFill>
+          <a:ln>
+            <a:noFill/>
+          </a:ln>
+          <a:effectLst/>
+        </p:spPr>
+        <p:style>
+          <a:lnRef idx="1">
+            <a:schemeClr val="accent1"/>
+          </a:lnRef>
+          <a:fillRef idx="3">
+            <a:schemeClr val="accent1"/>
+          </a:fillRef>
+          <a:effectRef idx="2">
+            <a:schemeClr val="accent1"/>
+          </a:effectRef>
+          <a:fontRef idx="minor">
+            <a:schemeClr val="lt1"/>
+          </a:fontRef>
+        </p:style>
+        <p:txBody>
+          <a:bodyPr rtlCol="0" anchor="ctr"/>
+          <a:lstStyle/>
+          <a:p>
+            <a:pPr algn="ctr"/>
+          </a:p>
+        </p:txBody>
+      </p:sp>
+      <p:sp>
+        <p:nvSpPr>
+          <p:cNvPr id="24" name="TextBox 23"/>
+          <p:cNvSpPr txBox="1"/>
+          <p:nvPr/>
+        </p:nvSpPr>
+        <p:spPr>
+          <a:xfrm>
+            <a:off x="461700" y="3601763"/>
+            <a:ext cx="280000" cy="280000"/>
+          </a:xfrm>
+          <a:prstGeom prst="rect">
+            <a:avLst/>
+          </a:prstGeom>
+          <a:noFill/>
+        </p:spPr>
+        <p:txBody>
+          <a:bodyPr wrap="square" anchor="ctr" lIns="0" rIns="0" tIns="0" bIns="0">
+            <a:spAutoFit/>
+          </a:bodyPr>
+          <a:lstStyle/>
+          <a:p>
+            <a:pPr algn="ctr"/>
+            <a:r>
+              <a:rPr sz="1200" b="1" i="0">
+                <a:solidFill>
+                  <a:srgbClr val="FFFDF8"/>
+                </a:solidFill>
+                <a:latin typeface="Segoe UI Semibold"/>
+              </a:rPr>
+              <a:t>5</a:t>
+            </a:r>
+          </a:p>
+        </p:txBody>
+      </p:sp>
+      <p:sp>
+        <p:nvSpPr>
+          <p:cNvPr id="25" name="TextBox 24"/>
+          <p:cNvSpPr txBox="1"/>
+          <p:nvPr/>
+        </p:nvSpPr>
+        <p:spPr>
+          <a:xfrm>
+            <a:off x="901700" y="3560028"/>
+            <a:ext cx="7780600" cy="363470"/>
+          </a:xfrm>
+          <a:prstGeom prst="rect">
+            <a:avLst/>
+          </a:prstGeom>
+          <a:noFill/>
+        </p:spPr>
+        <p:txBody>
+          <a:bodyPr wrap="square" anchor="ctr" lIns="0" rIns="0" tIns="0" bIns="0">
+            <a:spAutoFit/>
+          </a:bodyPr>
+          <a:lstStyle/>
+          <a:p>
+            <a:pPr algn="l">
+              <a:lnSpc>
+                <a:spcPct val="100000"/>
+              </a:lnSpc>
+            </a:pPr>
+            <a:r>
+              <a:rPr sz="1300" b="0" i="0">
+                <a:solidFill>
+                  <a:srgbClr val="181C23"/>
+                </a:solidFill>
+                <a:latin typeface="Segoe UI Semibold"/>
+              </a:rPr>
+              <a:t>Perguntas: </a:t>
+            </a:r>
+            <a:r>
+              <a:rPr sz="1300" b="0" i="0">
+                <a:solidFill>
+                  <a:srgbClr val="6A707D"/>
+                </a:solidFill>
+                <a:latin typeface="Segoe UI"/>
+              </a:rPr>
+              <a:t>2 min</a:t>
+            </a:r>
+          </a:p>
+        </p:txBody>
+      </p:sp>
+      <p:sp>
+        <p:nvSpPr>
+          <p:cNvPr id="26" name="Rounded Rectangle 25"/>
+          <p:cNvSpPr/>
+          <p:nvPr/>
+        </p:nvSpPr>
+        <p:spPr>
+          <a:xfrm>
+            <a:off x="311700" y="4163500"/>
+            <a:ext cx="8520600" cy="620000"/>
+          </a:xfrm>
+          <a:prstGeom prst="roundRect">
+            <a:avLst>
+              <a:gd name="adj" fmla="val 6000"/>
+            </a:avLst>
+          </a:prstGeom>
+          <a:solidFill>
+            <a:srgbClr val="DAF9DA"/>
+          </a:solidFill>
+          <a:ln>
+            <a:noFill/>
+          </a:ln>
+          <a:effectLst/>
+        </p:spPr>
+        <p:style>
+          <a:lnRef idx="1">
+            <a:schemeClr val="accent1"/>
+          </a:lnRef>
+          <a:fillRef idx="3">
+            <a:schemeClr val="accent1"/>
+          </a:fillRef>
+          <a:effectRef idx="2">
+            <a:schemeClr val="accent1"/>
+          </a:effectRef>
+          <a:fontRef idx="minor">
+            <a:schemeClr val="lt1"/>
+          </a:fontRef>
+        </p:style>
+        <p:txBody>
+          <a:bodyPr rtlCol="0" anchor="ctr"/>
+          <a:lstStyle/>
+          <a:p>
+            <a:pPr algn="ctr"/>
+          </a:p>
+        </p:txBody>
+      </p:sp>
+      <p:sp>
+        <p:nvSpPr>
+          <p:cNvPr id="27" name="Rounded Rectangle 26"/>
+          <p:cNvSpPr/>
+          <p:nvPr/>
+        </p:nvSpPr>
+        <p:spPr>
+          <a:xfrm>
+            <a:off x="311700" y="4163500"/>
+            <a:ext cx="70000" cy="620000"/>
           </a:xfrm>
           <a:prstGeom prst="roundRect">
             <a:avLst>
@@ -13061,101 +15037,57 @@
       </p:sp>
       <p:sp>
         <p:nvSpPr>
-          <p:cNvPr id="8" name="Oval 7"/>
-          <p:cNvSpPr/>
-          <p:nvPr/>
-        </p:nvSpPr>
-        <p:spPr>
-          <a:xfrm>
-            <a:off x="491700" y="1881148"/>
-            <a:ext cx="300000" cy="300000"/>
-          </a:xfrm>
-          <a:prstGeom prst="ellipse">
-            <a:avLst/>
-          </a:prstGeom>
-          <a:solidFill>
-            <a:srgbClr val="2371FF"/>
-          </a:solidFill>
-          <a:ln>
-            <a:noFill/>
-          </a:ln>
-          <a:effectLst/>
-        </p:spPr>
-        <p:style>
-          <a:lnRef idx="1">
-            <a:schemeClr val="accent1"/>
-          </a:lnRef>
-          <a:fillRef idx="3">
-            <a:schemeClr val="accent1"/>
-          </a:fillRef>
-          <a:effectRef idx="2">
-            <a:schemeClr val="accent1"/>
-          </a:effectRef>
-          <a:fontRef idx="minor">
-            <a:schemeClr val="lt1"/>
-          </a:fontRef>
-        </p:style>
-        <p:txBody>
-          <a:bodyPr rtlCol="0" anchor="ctr"/>
-          <a:lstStyle/>
-          <a:p>
-            <a:pPr algn="ctr"/>
-          </a:p>
-        </p:txBody>
-      </p:sp>
-      <p:sp>
-        <p:nvSpPr>
-          <p:cNvPr id="9" name="TextBox 8"/>
-          <p:cNvSpPr txBox="1"/>
-          <p:nvPr/>
-        </p:nvSpPr>
-        <p:spPr>
-          <a:xfrm>
-            <a:off x="491700" y="1881148"/>
-            <a:ext cx="300000" cy="300000"/>
-          </a:xfrm>
-          <a:prstGeom prst="rect">
-            <a:avLst/>
-          </a:prstGeom>
-          <a:noFill/>
-        </p:spPr>
-        <p:txBody>
-          <a:bodyPr wrap="square" anchor="ctr" lIns="0" rIns="0" tIns="0" bIns="0">
-            <a:spAutoFit/>
-          </a:bodyPr>
-          <a:lstStyle/>
-          <a:p>
-            <a:pPr algn="ctr"/>
-            <a:r>
-              <a:rPr sz="1400" b="1" i="0">
-                <a:solidFill>
-                  <a:srgbClr val="FFFDF8"/>
+          <p:cNvPr id="28" name="TextBox 27"/>
+          <p:cNvSpPr txBox="1"/>
+          <p:nvPr/>
+        </p:nvSpPr>
+        <p:spPr>
+          <a:xfrm>
+            <a:off x="511700" y="4233500"/>
+            <a:ext cx="8120600" cy="220000"/>
+          </a:xfrm>
+          <a:prstGeom prst="rect">
+            <a:avLst/>
+          </a:prstGeom>
+          <a:noFill/>
+        </p:spPr>
+        <p:txBody>
+          <a:bodyPr wrap="square" anchor="t" lIns="0" rIns="0" tIns="0" bIns="0">
+            <a:spAutoFit/>
+          </a:bodyPr>
+          <a:lstStyle/>
+          <a:p>
+            <a:pPr algn="l"/>
+            <a:r>
+              <a:rPr sz="1100" b="0" i="0">
+                <a:solidFill>
+                  <a:srgbClr val="2371FF"/>
                 </a:solidFill>
                 <a:latin typeface="Segoe UI Semibold"/>
               </a:rPr>
-              <a:t>✓</a:t>
-            </a:r>
-          </a:p>
-        </p:txBody>
-      </p:sp>
-      <p:sp>
-        <p:nvSpPr>
-          <p:cNvPr id="10" name="TextBox 9"/>
-          <p:cNvSpPr txBox="1"/>
-          <p:nvPr/>
-        </p:nvSpPr>
-        <p:spPr>
-          <a:xfrm>
-            <a:off x="971700" y="1746148"/>
-            <a:ext cx="7680600" cy="570000"/>
-          </a:xfrm>
-          <a:prstGeom prst="rect">
-            <a:avLst/>
-          </a:prstGeom>
-          <a:noFill/>
-        </p:spPr>
-        <p:txBody>
-          <a:bodyPr wrap="square" anchor="ctr" lIns="0" rIns="0" tIns="0" bIns="0">
+              <a:t>✅ ENTREGÁVEL</a:t>
+            </a:r>
+          </a:p>
+        </p:txBody>
+      </p:sp>
+      <p:sp>
+        <p:nvSpPr>
+          <p:cNvPr id="29" name="TextBox 28"/>
+          <p:cNvSpPr txBox="1"/>
+          <p:nvPr/>
+        </p:nvSpPr>
+        <p:spPr>
+          <a:xfrm>
+            <a:off x="511700" y="4453500"/>
+            <a:ext cx="8120600" cy="300000"/>
+          </a:xfrm>
+          <a:prstGeom prst="rect">
+            <a:avLst/>
+          </a:prstGeom>
+          <a:noFill/>
+        </p:spPr>
+        <p:txBody>
+          <a:bodyPr wrap="square" anchor="t" lIns="0" rIns="0" tIns="0" bIns="0">
             <a:spAutoFit/>
           </a:bodyPr>
           <a:lstStyle/>
@@ -13166,32 +15098,30 @@
               </a:lnSpc>
             </a:pPr>
             <a:r>
-              <a:rPr sz="1300" b="0" i="0">
+              <a:rPr sz="1200" b="0" i="1">
                 <a:solidFill>
                   <a:srgbClr val="181C23"/>
                 </a:solidFill>
                 <a:latin typeface="Segoe UI"/>
               </a:rPr>
-              <a:t>Política → inventário → cadeia → compliance: uma camada de governança sobre o pipeline DevSecOps.</a:t>
-            </a:r>
-          </a:p>
-        </p:txBody>
-      </p:sp>
-      <p:sp>
-        <p:nvSpPr>
-          <p:cNvPr id="11" name="Rounded Rectangle 10"/>
+              <a:t>Repositório, README com mapeamento de frameworks, evidências e apresentação. Rubrica: 0–100 pontos.</a:t>
+            </a:r>
+          </a:p>
+        </p:txBody>
+      </p:sp>
+      <p:sp>
+        <p:nvSpPr>
+          <p:cNvPr id="30" name="Rectangle 29"/>
           <p:cNvSpPr/>
           <p:nvPr/>
         </p:nvSpPr>
         <p:spPr>
           <a:xfrm>
-            <a:off x="311700" y="2446148"/>
-            <a:ext cx="8520600" cy="570000"/>
-          </a:xfrm>
-          <a:prstGeom prst="roundRect">
-            <a:avLst>
-              <a:gd name="adj" fmla="val 8000"/>
-            </a:avLst>
+            <a:off x="311700" y="4843500"/>
+            <a:ext cx="8520600" cy="6000"/>
+          </a:xfrm>
+          <a:prstGeom prst="rect">
+            <a:avLst/>
           </a:prstGeom>
           <a:solidFill>
             <a:srgbClr val="ECEDF3"/>
@@ -13225,635 +15155,7 @@
       </p:sp>
       <p:sp>
         <p:nvSpPr>
-          <p:cNvPr id="12" name="Rounded Rectangle 11"/>
-          <p:cNvSpPr/>
-          <p:nvPr/>
-        </p:nvSpPr>
-        <p:spPr>
-          <a:xfrm>
-            <a:off x="311700" y="2446148"/>
-            <a:ext cx="70000" cy="570000"/>
-          </a:xfrm>
-          <a:prstGeom prst="roundRect">
-            <a:avLst>
-              <a:gd name="adj" fmla="val 50000"/>
-            </a:avLst>
-          </a:prstGeom>
-          <a:solidFill>
-            <a:srgbClr val="A6F750"/>
-          </a:solidFill>
-          <a:ln>
-            <a:noFill/>
-          </a:ln>
-          <a:effectLst/>
-        </p:spPr>
-        <p:style>
-          <a:lnRef idx="1">
-            <a:schemeClr val="accent1"/>
-          </a:lnRef>
-          <a:fillRef idx="3">
-            <a:schemeClr val="accent1"/>
-          </a:fillRef>
-          <a:effectRef idx="2">
-            <a:schemeClr val="accent1"/>
-          </a:effectRef>
-          <a:fontRef idx="minor">
-            <a:schemeClr val="lt1"/>
-          </a:fontRef>
-        </p:style>
-        <p:txBody>
-          <a:bodyPr rtlCol="0" anchor="ctr"/>
-          <a:lstStyle/>
-          <a:p>
-            <a:pPr algn="ctr"/>
-          </a:p>
-        </p:txBody>
-      </p:sp>
-      <p:sp>
-        <p:nvSpPr>
-          <p:cNvPr id="13" name="Oval 12"/>
-          <p:cNvSpPr/>
-          <p:nvPr/>
-        </p:nvSpPr>
-        <p:spPr>
-          <a:xfrm>
-            <a:off x="491700" y="2581148"/>
-            <a:ext cx="300000" cy="300000"/>
-          </a:xfrm>
-          <a:prstGeom prst="ellipse">
-            <a:avLst/>
-          </a:prstGeom>
-          <a:solidFill>
-            <a:srgbClr val="2371FF"/>
-          </a:solidFill>
-          <a:ln>
-            <a:noFill/>
-          </a:ln>
-          <a:effectLst/>
-        </p:spPr>
-        <p:style>
-          <a:lnRef idx="1">
-            <a:schemeClr val="accent1"/>
-          </a:lnRef>
-          <a:fillRef idx="3">
-            <a:schemeClr val="accent1"/>
-          </a:fillRef>
-          <a:effectRef idx="2">
-            <a:schemeClr val="accent1"/>
-          </a:effectRef>
-          <a:fontRef idx="minor">
-            <a:schemeClr val="lt1"/>
-          </a:fontRef>
-        </p:style>
-        <p:txBody>
-          <a:bodyPr rtlCol="0" anchor="ctr"/>
-          <a:lstStyle/>
-          <a:p>
-            <a:pPr algn="ctr"/>
-          </a:p>
-        </p:txBody>
-      </p:sp>
-      <p:sp>
-        <p:nvSpPr>
-          <p:cNvPr id="14" name="TextBox 13"/>
-          <p:cNvSpPr txBox="1"/>
-          <p:nvPr/>
-        </p:nvSpPr>
-        <p:spPr>
-          <a:xfrm>
-            <a:off x="491700" y="2581148"/>
-            <a:ext cx="300000" cy="300000"/>
-          </a:xfrm>
-          <a:prstGeom prst="rect">
-            <a:avLst/>
-          </a:prstGeom>
-          <a:noFill/>
-        </p:spPr>
-        <p:txBody>
-          <a:bodyPr wrap="square" anchor="ctr" lIns="0" rIns="0" tIns="0" bIns="0">
-            <a:spAutoFit/>
-          </a:bodyPr>
-          <a:lstStyle/>
-          <a:p>
-            <a:pPr algn="ctr"/>
-            <a:r>
-              <a:rPr sz="1400" b="1" i="0">
-                <a:solidFill>
-                  <a:srgbClr val="FFFDF8"/>
-                </a:solidFill>
-                <a:latin typeface="Segoe UI Semibold"/>
-              </a:rPr>
-              <a:t>✓</a:t>
-            </a:r>
-          </a:p>
-        </p:txBody>
-      </p:sp>
-      <p:sp>
-        <p:nvSpPr>
-          <p:cNvPr id="15" name="TextBox 14"/>
-          <p:cNvSpPr txBox="1"/>
-          <p:nvPr/>
-        </p:nvSpPr>
-        <p:spPr>
-          <a:xfrm>
-            <a:off x="971700" y="2446148"/>
-            <a:ext cx="7680600" cy="570000"/>
-          </a:xfrm>
-          <a:prstGeom prst="rect">
-            <a:avLst/>
-          </a:prstGeom>
-          <a:noFill/>
-        </p:spPr>
-        <p:txBody>
-          <a:bodyPr wrap="square" anchor="ctr" lIns="0" rIns="0" tIns="0" bIns="0">
-            <a:spAutoFit/>
-          </a:bodyPr>
-          <a:lstStyle/>
-          <a:p>
-            <a:pPr algn="l">
-              <a:lnSpc>
-                <a:spcPct val="105000"/>
-              </a:lnSpc>
-            </a:pPr>
-            <a:r>
-              <a:rPr sz="1300" b="0" i="0">
-                <a:solidFill>
-                  <a:srgbClr val="181C23"/>
-                </a:solidFill>
-                <a:latin typeface="Segoe UI"/>
-              </a:rPr>
-              <a:t>Controles viram código, código vira gate, gate vira evidência.</a:t>
-            </a:r>
-          </a:p>
-        </p:txBody>
-      </p:sp>
-      <p:sp>
-        <p:nvSpPr>
-          <p:cNvPr id="16" name="Rounded Rectangle 15"/>
-          <p:cNvSpPr/>
-          <p:nvPr/>
-        </p:nvSpPr>
-        <p:spPr>
-          <a:xfrm>
-            <a:off x="311700" y="3146148"/>
-            <a:ext cx="8520600" cy="570000"/>
-          </a:xfrm>
-          <a:prstGeom prst="roundRect">
-            <a:avLst>
-              <a:gd name="adj" fmla="val 8000"/>
-            </a:avLst>
-          </a:prstGeom>
-          <a:solidFill>
-            <a:srgbClr val="ECEDF3"/>
-          </a:solidFill>
-          <a:ln>
-            <a:noFill/>
-          </a:ln>
-          <a:effectLst/>
-        </p:spPr>
-        <p:style>
-          <a:lnRef idx="1">
-            <a:schemeClr val="accent1"/>
-          </a:lnRef>
-          <a:fillRef idx="3">
-            <a:schemeClr val="accent1"/>
-          </a:fillRef>
-          <a:effectRef idx="2">
-            <a:schemeClr val="accent1"/>
-          </a:effectRef>
-          <a:fontRef idx="minor">
-            <a:schemeClr val="lt1"/>
-          </a:fontRef>
-        </p:style>
-        <p:txBody>
-          <a:bodyPr rtlCol="0" anchor="ctr"/>
-          <a:lstStyle/>
-          <a:p>
-            <a:pPr algn="ctr"/>
-          </a:p>
-        </p:txBody>
-      </p:sp>
-      <p:sp>
-        <p:nvSpPr>
-          <p:cNvPr id="17" name="Rounded Rectangle 16"/>
-          <p:cNvSpPr/>
-          <p:nvPr/>
-        </p:nvSpPr>
-        <p:spPr>
-          <a:xfrm>
-            <a:off x="311700" y="3146148"/>
-            <a:ext cx="70000" cy="570000"/>
-          </a:xfrm>
-          <a:prstGeom prst="roundRect">
-            <a:avLst>
-              <a:gd name="adj" fmla="val 50000"/>
-            </a:avLst>
-          </a:prstGeom>
-          <a:solidFill>
-            <a:srgbClr val="A6F750"/>
-          </a:solidFill>
-          <a:ln>
-            <a:noFill/>
-          </a:ln>
-          <a:effectLst/>
-        </p:spPr>
-        <p:style>
-          <a:lnRef idx="1">
-            <a:schemeClr val="accent1"/>
-          </a:lnRef>
-          <a:fillRef idx="3">
-            <a:schemeClr val="accent1"/>
-          </a:fillRef>
-          <a:effectRef idx="2">
-            <a:schemeClr val="accent1"/>
-          </a:effectRef>
-          <a:fontRef idx="minor">
-            <a:schemeClr val="lt1"/>
-          </a:fontRef>
-        </p:style>
-        <p:txBody>
-          <a:bodyPr rtlCol="0" anchor="ctr"/>
-          <a:lstStyle/>
-          <a:p>
-            <a:pPr algn="ctr"/>
-          </a:p>
-        </p:txBody>
-      </p:sp>
-      <p:sp>
-        <p:nvSpPr>
-          <p:cNvPr id="18" name="Oval 17"/>
-          <p:cNvSpPr/>
-          <p:nvPr/>
-        </p:nvSpPr>
-        <p:spPr>
-          <a:xfrm>
-            <a:off x="491700" y="3281148"/>
-            <a:ext cx="300000" cy="300000"/>
-          </a:xfrm>
-          <a:prstGeom prst="ellipse">
-            <a:avLst/>
-          </a:prstGeom>
-          <a:solidFill>
-            <a:srgbClr val="2371FF"/>
-          </a:solidFill>
-          <a:ln>
-            <a:noFill/>
-          </a:ln>
-          <a:effectLst/>
-        </p:spPr>
-        <p:style>
-          <a:lnRef idx="1">
-            <a:schemeClr val="accent1"/>
-          </a:lnRef>
-          <a:fillRef idx="3">
-            <a:schemeClr val="accent1"/>
-          </a:fillRef>
-          <a:effectRef idx="2">
-            <a:schemeClr val="accent1"/>
-          </a:effectRef>
-          <a:fontRef idx="minor">
-            <a:schemeClr val="lt1"/>
-          </a:fontRef>
-        </p:style>
-        <p:txBody>
-          <a:bodyPr rtlCol="0" anchor="ctr"/>
-          <a:lstStyle/>
-          <a:p>
-            <a:pPr algn="ctr"/>
-          </a:p>
-        </p:txBody>
-      </p:sp>
-      <p:sp>
-        <p:nvSpPr>
-          <p:cNvPr id="19" name="TextBox 18"/>
-          <p:cNvSpPr txBox="1"/>
-          <p:nvPr/>
-        </p:nvSpPr>
-        <p:spPr>
-          <a:xfrm>
-            <a:off x="491700" y="3281148"/>
-            <a:ext cx="300000" cy="300000"/>
-          </a:xfrm>
-          <a:prstGeom prst="rect">
-            <a:avLst/>
-          </a:prstGeom>
-          <a:noFill/>
-        </p:spPr>
-        <p:txBody>
-          <a:bodyPr wrap="square" anchor="ctr" lIns="0" rIns="0" tIns="0" bIns="0">
-            <a:spAutoFit/>
-          </a:bodyPr>
-          <a:lstStyle/>
-          <a:p>
-            <a:pPr algn="ctr"/>
-            <a:r>
-              <a:rPr sz="1400" b="1" i="0">
-                <a:solidFill>
-                  <a:srgbClr val="FFFDF8"/>
-                </a:solidFill>
-                <a:latin typeface="Segoe UI Semibold"/>
-              </a:rPr>
-              <a:t>✓</a:t>
-            </a:r>
-          </a:p>
-        </p:txBody>
-      </p:sp>
-      <p:sp>
-        <p:nvSpPr>
-          <p:cNvPr id="20" name="TextBox 19"/>
-          <p:cNvSpPr txBox="1"/>
-          <p:nvPr/>
-        </p:nvSpPr>
-        <p:spPr>
-          <a:xfrm>
-            <a:off x="971700" y="3146148"/>
-            <a:ext cx="7680600" cy="570000"/>
-          </a:xfrm>
-          <a:prstGeom prst="rect">
-            <a:avLst/>
-          </a:prstGeom>
-          <a:noFill/>
-        </p:spPr>
-        <p:txBody>
-          <a:bodyPr wrap="square" anchor="ctr" lIns="0" rIns="0" tIns="0" bIns="0">
-            <a:spAutoFit/>
-          </a:bodyPr>
-          <a:lstStyle/>
-          <a:p>
-            <a:pPr algn="l">
-              <a:lnSpc>
-                <a:spcPct val="105000"/>
-              </a:lnSpc>
-            </a:pPr>
-            <a:r>
-              <a:rPr sz="1300" b="0" i="0">
-                <a:solidFill>
-                  <a:srgbClr val="181C23"/>
-                </a:solidFill>
-                <a:latin typeface="Segoe UI"/>
-              </a:rPr>
-              <a:t>As rubricas registram o aprendizado e orientam os próximos passos.</a:t>
-            </a:r>
-          </a:p>
-        </p:txBody>
-      </p:sp>
-      <p:sp>
-        <p:nvSpPr>
-          <p:cNvPr id="21" name="Rounded Rectangle 20"/>
-          <p:cNvSpPr/>
-          <p:nvPr/>
-        </p:nvSpPr>
-        <p:spPr>
-          <a:xfrm>
-            <a:off x="311700" y="3846148"/>
-            <a:ext cx="8520600" cy="570000"/>
-          </a:xfrm>
-          <a:prstGeom prst="roundRect">
-            <a:avLst>
-              <a:gd name="adj" fmla="val 8000"/>
-            </a:avLst>
-          </a:prstGeom>
-          <a:solidFill>
-            <a:srgbClr val="ECEDF3"/>
-          </a:solidFill>
-          <a:ln>
-            <a:noFill/>
-          </a:ln>
-          <a:effectLst/>
-        </p:spPr>
-        <p:style>
-          <a:lnRef idx="1">
-            <a:schemeClr val="accent1"/>
-          </a:lnRef>
-          <a:fillRef idx="3">
-            <a:schemeClr val="accent1"/>
-          </a:fillRef>
-          <a:effectRef idx="2">
-            <a:schemeClr val="accent1"/>
-          </a:effectRef>
-          <a:fontRef idx="minor">
-            <a:schemeClr val="lt1"/>
-          </a:fontRef>
-        </p:style>
-        <p:txBody>
-          <a:bodyPr rtlCol="0" anchor="ctr"/>
-          <a:lstStyle/>
-          <a:p>
-            <a:pPr algn="ctr"/>
-          </a:p>
-        </p:txBody>
-      </p:sp>
-      <p:sp>
-        <p:nvSpPr>
-          <p:cNvPr id="22" name="Rounded Rectangle 21"/>
-          <p:cNvSpPr/>
-          <p:nvPr/>
-        </p:nvSpPr>
-        <p:spPr>
-          <a:xfrm>
-            <a:off x="311700" y="3846148"/>
-            <a:ext cx="70000" cy="570000"/>
-          </a:xfrm>
-          <a:prstGeom prst="roundRect">
-            <a:avLst>
-              <a:gd name="adj" fmla="val 50000"/>
-            </a:avLst>
-          </a:prstGeom>
-          <a:solidFill>
-            <a:srgbClr val="A6F750"/>
-          </a:solidFill>
-          <a:ln>
-            <a:noFill/>
-          </a:ln>
-          <a:effectLst/>
-        </p:spPr>
-        <p:style>
-          <a:lnRef idx="1">
-            <a:schemeClr val="accent1"/>
-          </a:lnRef>
-          <a:fillRef idx="3">
-            <a:schemeClr val="accent1"/>
-          </a:fillRef>
-          <a:effectRef idx="2">
-            <a:schemeClr val="accent1"/>
-          </a:effectRef>
-          <a:fontRef idx="minor">
-            <a:schemeClr val="lt1"/>
-          </a:fontRef>
-        </p:style>
-        <p:txBody>
-          <a:bodyPr rtlCol="0" anchor="ctr"/>
-          <a:lstStyle/>
-          <a:p>
-            <a:pPr algn="ctr"/>
-          </a:p>
-        </p:txBody>
-      </p:sp>
-      <p:sp>
-        <p:nvSpPr>
-          <p:cNvPr id="23" name="Oval 22"/>
-          <p:cNvSpPr/>
-          <p:nvPr/>
-        </p:nvSpPr>
-        <p:spPr>
-          <a:xfrm>
-            <a:off x="491700" y="3981148"/>
-            <a:ext cx="300000" cy="300000"/>
-          </a:xfrm>
-          <a:prstGeom prst="ellipse">
-            <a:avLst/>
-          </a:prstGeom>
-          <a:solidFill>
-            <a:srgbClr val="2371FF"/>
-          </a:solidFill>
-          <a:ln>
-            <a:noFill/>
-          </a:ln>
-          <a:effectLst/>
-        </p:spPr>
-        <p:style>
-          <a:lnRef idx="1">
-            <a:schemeClr val="accent1"/>
-          </a:lnRef>
-          <a:fillRef idx="3">
-            <a:schemeClr val="accent1"/>
-          </a:fillRef>
-          <a:effectRef idx="2">
-            <a:schemeClr val="accent1"/>
-          </a:effectRef>
-          <a:fontRef idx="minor">
-            <a:schemeClr val="lt1"/>
-          </a:fontRef>
-        </p:style>
-        <p:txBody>
-          <a:bodyPr rtlCol="0" anchor="ctr"/>
-          <a:lstStyle/>
-          <a:p>
-            <a:pPr algn="ctr"/>
-          </a:p>
-        </p:txBody>
-      </p:sp>
-      <p:sp>
-        <p:nvSpPr>
-          <p:cNvPr id="24" name="TextBox 23"/>
-          <p:cNvSpPr txBox="1"/>
-          <p:nvPr/>
-        </p:nvSpPr>
-        <p:spPr>
-          <a:xfrm>
-            <a:off x="491700" y="3981148"/>
-            <a:ext cx="300000" cy="300000"/>
-          </a:xfrm>
-          <a:prstGeom prst="rect">
-            <a:avLst/>
-          </a:prstGeom>
-          <a:noFill/>
-        </p:spPr>
-        <p:txBody>
-          <a:bodyPr wrap="square" anchor="ctr" lIns="0" rIns="0" tIns="0" bIns="0">
-            <a:spAutoFit/>
-          </a:bodyPr>
-          <a:lstStyle/>
-          <a:p>
-            <a:pPr algn="ctr"/>
-            <a:r>
-              <a:rPr sz="1400" b="1" i="0">
-                <a:solidFill>
-                  <a:srgbClr val="FFFDF8"/>
-                </a:solidFill>
-                <a:latin typeface="Segoe UI Semibold"/>
-              </a:rPr>
-              <a:t>✓</a:t>
-            </a:r>
-          </a:p>
-        </p:txBody>
-      </p:sp>
-      <p:sp>
-        <p:nvSpPr>
-          <p:cNvPr id="25" name="TextBox 24"/>
-          <p:cNvSpPr txBox="1"/>
-          <p:nvPr/>
-        </p:nvSpPr>
-        <p:spPr>
-          <a:xfrm>
-            <a:off x="971700" y="3846148"/>
-            <a:ext cx="7680600" cy="570000"/>
-          </a:xfrm>
-          <a:prstGeom prst="rect">
-            <a:avLst/>
-          </a:prstGeom>
-          <a:noFill/>
-        </p:spPr>
-        <p:txBody>
-          <a:bodyPr wrap="square" anchor="ctr" lIns="0" rIns="0" tIns="0" bIns="0">
-            <a:spAutoFit/>
-          </a:bodyPr>
-          <a:lstStyle/>
-          <a:p>
-            <a:pPr algn="l">
-              <a:lnSpc>
-                <a:spcPct val="105000"/>
-              </a:lnSpc>
-            </a:pPr>
-            <a:r>
-              <a:rPr sz="1300" b="0" i="0">
-                <a:solidFill>
-                  <a:srgbClr val="181C23"/>
-                </a:solidFill>
-                <a:latin typeface="Segoe UI"/>
-              </a:rPr>
-              <a:t>Parabéns! Você concluiu o módulo CY-SE-013 — Supply Chain Security! 🎉</a:t>
-            </a:r>
-          </a:p>
-        </p:txBody>
-      </p:sp>
-      <p:sp>
-        <p:nvSpPr>
-          <p:cNvPr id="26" name="Rectangle 25"/>
-          <p:cNvSpPr/>
-          <p:nvPr/>
-        </p:nvSpPr>
-        <p:spPr>
-          <a:xfrm>
-            <a:off x="311700" y="4843500"/>
-            <a:ext cx="8520600" cy="6000"/>
-          </a:xfrm>
-          <a:prstGeom prst="rect">
-            <a:avLst/>
-          </a:prstGeom>
-          <a:solidFill>
-            <a:srgbClr val="ECEDF3"/>
-          </a:solidFill>
-          <a:ln>
-            <a:noFill/>
-          </a:ln>
-          <a:effectLst/>
-        </p:spPr>
-        <p:style>
-          <a:lnRef idx="1">
-            <a:schemeClr val="accent1"/>
-          </a:lnRef>
-          <a:fillRef idx="3">
-            <a:schemeClr val="accent1"/>
-          </a:fillRef>
-          <a:effectRef idx="2">
-            <a:schemeClr val="accent1"/>
-          </a:effectRef>
-          <a:fontRef idx="minor">
-            <a:schemeClr val="lt1"/>
-          </a:fontRef>
-        </p:style>
-        <p:txBody>
-          <a:bodyPr rtlCol="0" anchor="ctr"/>
-          <a:lstStyle/>
-          <a:p>
-            <a:pPr algn="ctr"/>
-          </a:p>
-        </p:txBody>
-      </p:sp>
-      <p:sp>
-        <p:nvSpPr>
-          <p:cNvPr id="27" name="TextBox 26"/>
+          <p:cNvPr id="31" name="TextBox 30"/>
           <p:cNvSpPr txBox="1"/>
           <p:nvPr/>
         </p:nvSpPr>
@@ -13888,7 +15190,7 @@
       </p:sp>
       <p:sp>
         <p:nvSpPr>
-          <p:cNvPr id="28" name="TextBox 27"/>
+          <p:cNvPr id="32" name="TextBox 31"/>
           <p:cNvSpPr txBox="1"/>
           <p:nvPr/>
         </p:nvSpPr>
@@ -13916,7 +15218,7 @@
                 </a:solidFill>
                 <a:latin typeface="Segoe UI Semibold"/>
               </a:rPr>
-              <a:t>9</a:t>
+              <a:t>8</a:t>
             </a:r>
           </a:p>
         </p:txBody>
